--- a/materials/Week03.pptx
+++ b/materials/Week03.pptx
@@ -5,35 +5,36 @@
     <p:sldMasterId id="2147483648" r:id="rId1"/>
   </p:sldMasterIdLst>
   <p:sldIdLst>
-    <p:sldId id="256" r:id="rId7"/>
-    <p:sldId id="257" r:id="rId8"/>
-    <p:sldId id="258" r:id="rId9"/>
-    <p:sldId id="259" r:id="rId10"/>
-    <p:sldId id="260" r:id="rId11"/>
-    <p:sldId id="261" r:id="rId12"/>
-    <p:sldId id="262" r:id="rId13"/>
-    <p:sldId id="263" r:id="rId14"/>
-    <p:sldId id="264" r:id="rId15"/>
-    <p:sldId id="265" r:id="rId16"/>
-    <p:sldId id="266" r:id="rId17"/>
-    <p:sldId id="267" r:id="rId18"/>
-    <p:sldId id="268" r:id="rId19"/>
-    <p:sldId id="269" r:id="rId20"/>
-    <p:sldId id="270" r:id="rId21"/>
-    <p:sldId id="271" r:id="rId22"/>
-    <p:sldId id="272" r:id="rId23"/>
-    <p:sldId id="273" r:id="rId24"/>
-    <p:sldId id="274" r:id="rId25"/>
-    <p:sldId id="275" r:id="rId26"/>
-    <p:sldId id="276" r:id="rId27"/>
-    <p:sldId id="277" r:id="rId28"/>
-    <p:sldId id="278" r:id="rId29"/>
-    <p:sldId id="279" r:id="rId30"/>
-    <p:sldId id="280" r:id="rId31"/>
-    <p:sldId id="281" r:id="rId32"/>
-    <p:sldId id="282" r:id="rId33"/>
+    <p:sldId id="256" r:id="rId2"/>
+    <p:sldId id="257" r:id="rId3"/>
+    <p:sldId id="258" r:id="rId4"/>
+    <p:sldId id="259" r:id="rId5"/>
+    <p:sldId id="260" r:id="rId6"/>
+    <p:sldId id="261" r:id="rId7"/>
+    <p:sldId id="262" r:id="rId8"/>
+    <p:sldId id="263" r:id="rId9"/>
+    <p:sldId id="264" r:id="rId10"/>
+    <p:sldId id="265" r:id="rId11"/>
+    <p:sldId id="266" r:id="rId12"/>
+    <p:sldId id="267" r:id="rId13"/>
+    <p:sldId id="268" r:id="rId14"/>
+    <p:sldId id="269" r:id="rId15"/>
+    <p:sldId id="283" r:id="rId16"/>
+    <p:sldId id="270" r:id="rId17"/>
+    <p:sldId id="271" r:id="rId18"/>
+    <p:sldId id="272" r:id="rId19"/>
+    <p:sldId id="273" r:id="rId20"/>
+    <p:sldId id="274" r:id="rId21"/>
+    <p:sldId id="275" r:id="rId22"/>
+    <p:sldId id="276" r:id="rId23"/>
+    <p:sldId id="277" r:id="rId24"/>
+    <p:sldId id="278" r:id="rId25"/>
+    <p:sldId id="279" r:id="rId26"/>
+    <p:sldId id="280" r:id="rId27"/>
+    <p:sldId id="281" r:id="rId28"/>
+    <p:sldId id="282" r:id="rId29"/>
   </p:sldIdLst>
-  <p:sldSz cx="12191695" cy="6858000" type="screen4x3"/>
+  <p:sldSz cx="12192000" cy="6858000"/>
   <p:notesSz cx="6858000" cy="9144000"/>
   <p:defaultTextStyle>
     <a:defPPr>
@@ -130,6 +131,22 @@
       </a:defRPr>
     </a:lvl9pPr>
   </p:defaultTextStyle>
+  <p:extLst>
+    <p:ext uri="{EFAFB233-063F-42B5-8137-9DF3F51BA10A}">
+      <p15:sldGuideLst xmlns:p15="http://schemas.microsoft.com/office/powerpoint/2012/main">
+        <p15:guide id="1" orient="horz" pos="2160">
+          <p15:clr>
+            <a:srgbClr val="A4A3A4"/>
+          </p15:clr>
+        </p15:guide>
+        <p15:guide id="2" pos="2880">
+          <p15:clr>
+            <a:srgbClr val="A4A3A4"/>
+          </p15:clr>
+        </p15:guide>
+      </p15:sldGuideLst>
+    </p:ext>
+  </p:extLst>
 </p:presentation>
 </file>
 
@@ -171,10 +188,9 @@
           <a:lstStyle/>
           <a:p>
             <a:r>
-              <a:rPr lang="en-US" smtClean="0"/>
+              <a:rPr lang="en-US"/>
               <a:t>Click to edit Master title style</a:t>
             </a:r>
-            <a:endParaRPr lang="en-US"/>
           </a:p>
         </p:txBody>
       </p:sp>
@@ -290,10 +306,9 @@
           </a:lstStyle>
           <a:p>
             <a:r>
-              <a:rPr lang="en-US" smtClean="0"/>
+              <a:rPr lang="en-US"/>
               <a:t>Click to edit Master subtitle style</a:t>
             </a:r>
-            <a:endParaRPr lang="en-US"/>
           </a:p>
         </p:txBody>
       </p:sp>
@@ -314,7 +329,7 @@
           <a:p>
             <a:fld id="{5BCAD085-E8A6-8845-BD4E-CB4CCA059FC4}" type="datetimeFigureOut">
               <a:rPr lang="en-US" smtClean="0"/>
-              <a:t>1/27/13</a:t>
+              <a:t>9/30/2026</a:t>
             </a:fld>
             <a:endParaRPr lang="en-US"/>
           </a:p>
@@ -408,10 +423,9 @@
           <a:lstStyle/>
           <a:p>
             <a:r>
-              <a:rPr lang="en-US" smtClean="0"/>
+              <a:rPr lang="en-US"/>
               <a:t>Click to edit Master title style</a:t>
             </a:r>
-            <a:endParaRPr lang="en-US"/>
           </a:p>
         </p:txBody>
       </p:sp>
@@ -432,38 +446,37 @@
           <a:p>
             <a:pPr lvl="0"/>
             <a:r>
-              <a:rPr lang="en-US" smtClean="0"/>
+              <a:rPr lang="en-US"/>
               <a:t>Click to edit Master text styles</a:t>
             </a:r>
           </a:p>
           <a:p>
             <a:pPr lvl="1"/>
             <a:r>
-              <a:rPr lang="en-US" smtClean="0"/>
+              <a:rPr lang="en-US"/>
               <a:t>Second level</a:t>
             </a:r>
           </a:p>
           <a:p>
             <a:pPr lvl="2"/>
             <a:r>
-              <a:rPr lang="en-US" smtClean="0"/>
+              <a:rPr lang="en-US"/>
               <a:t>Third level</a:t>
             </a:r>
           </a:p>
           <a:p>
             <a:pPr lvl="3"/>
             <a:r>
-              <a:rPr lang="en-US" smtClean="0"/>
+              <a:rPr lang="en-US"/>
               <a:t>Fourth level</a:t>
             </a:r>
           </a:p>
           <a:p>
             <a:pPr lvl="4"/>
             <a:r>
-              <a:rPr lang="en-US" smtClean="0"/>
+              <a:rPr lang="en-US"/>
               <a:t>Fifth level</a:t>
             </a:r>
-            <a:endParaRPr lang="en-US"/>
           </a:p>
         </p:txBody>
       </p:sp>
@@ -484,7 +497,7 @@
           <a:p>
             <a:fld id="{5BCAD085-E8A6-8845-BD4E-CB4CCA059FC4}" type="datetimeFigureOut">
               <a:rPr lang="en-US" smtClean="0"/>
-              <a:t>1/27/13</a:t>
+              <a:t>9/30/2026</a:t>
             </a:fld>
             <a:endParaRPr lang="en-US"/>
           </a:p>
@@ -583,10 +596,9 @@
           <a:lstStyle/>
           <a:p>
             <a:r>
-              <a:rPr lang="en-US" smtClean="0"/>
+              <a:rPr lang="en-US"/>
               <a:t>Click to edit Master title style</a:t>
             </a:r>
-            <a:endParaRPr lang="en-US"/>
           </a:p>
         </p:txBody>
       </p:sp>
@@ -612,38 +624,37 @@
           <a:p>
             <a:pPr lvl="0"/>
             <a:r>
-              <a:rPr lang="en-US" smtClean="0"/>
+              <a:rPr lang="en-US"/>
               <a:t>Click to edit Master text styles</a:t>
             </a:r>
           </a:p>
           <a:p>
             <a:pPr lvl="1"/>
             <a:r>
-              <a:rPr lang="en-US" smtClean="0"/>
+              <a:rPr lang="en-US"/>
               <a:t>Second level</a:t>
             </a:r>
           </a:p>
           <a:p>
             <a:pPr lvl="2"/>
             <a:r>
-              <a:rPr lang="en-US" smtClean="0"/>
+              <a:rPr lang="en-US"/>
               <a:t>Third level</a:t>
             </a:r>
           </a:p>
           <a:p>
             <a:pPr lvl="3"/>
             <a:r>
-              <a:rPr lang="en-US" smtClean="0"/>
+              <a:rPr lang="en-US"/>
               <a:t>Fourth level</a:t>
             </a:r>
           </a:p>
           <a:p>
             <a:pPr lvl="4"/>
             <a:r>
-              <a:rPr lang="en-US" smtClean="0"/>
+              <a:rPr lang="en-US"/>
               <a:t>Fifth level</a:t>
             </a:r>
-            <a:endParaRPr lang="en-US"/>
           </a:p>
         </p:txBody>
       </p:sp>
@@ -664,7 +675,7 @@
           <a:p>
             <a:fld id="{5BCAD085-E8A6-8845-BD4E-CB4CCA059FC4}" type="datetimeFigureOut">
               <a:rPr lang="en-US" smtClean="0"/>
-              <a:t>1/27/13</a:t>
+              <a:t>9/30/2026</a:t>
             </a:fld>
             <a:endParaRPr lang="en-US"/>
           </a:p>
@@ -758,10 +769,9 @@
           <a:lstStyle/>
           <a:p>
             <a:r>
-              <a:rPr lang="en-US" smtClean="0"/>
+              <a:rPr lang="en-US"/>
               <a:t>Click to edit Master title style</a:t>
             </a:r>
-            <a:endParaRPr lang="en-US"/>
           </a:p>
         </p:txBody>
       </p:sp>
@@ -782,38 +792,37 @@
           <a:p>
             <a:pPr lvl="0"/>
             <a:r>
-              <a:rPr lang="en-US" smtClean="0"/>
+              <a:rPr lang="en-US"/>
               <a:t>Click to edit Master text styles</a:t>
             </a:r>
           </a:p>
           <a:p>
             <a:pPr lvl="1"/>
             <a:r>
-              <a:rPr lang="en-US" smtClean="0"/>
+              <a:rPr lang="en-US"/>
               <a:t>Second level</a:t>
             </a:r>
           </a:p>
           <a:p>
             <a:pPr lvl="2"/>
             <a:r>
-              <a:rPr lang="en-US" smtClean="0"/>
+              <a:rPr lang="en-US"/>
               <a:t>Third level</a:t>
             </a:r>
           </a:p>
           <a:p>
             <a:pPr lvl="3"/>
             <a:r>
-              <a:rPr lang="en-US" smtClean="0"/>
+              <a:rPr lang="en-US"/>
               <a:t>Fourth level</a:t>
             </a:r>
           </a:p>
           <a:p>
             <a:pPr lvl="4"/>
             <a:r>
-              <a:rPr lang="en-US" smtClean="0"/>
+              <a:rPr lang="en-US"/>
               <a:t>Fifth level</a:t>
             </a:r>
-            <a:endParaRPr lang="en-US"/>
           </a:p>
         </p:txBody>
       </p:sp>
@@ -834,7 +843,7 @@
           <a:p>
             <a:fld id="{5BCAD085-E8A6-8845-BD4E-CB4CCA059FC4}" type="datetimeFigureOut">
               <a:rPr lang="en-US" smtClean="0"/>
-              <a:t>1/27/13</a:t>
+              <a:t>9/30/2026</a:t>
             </a:fld>
             <a:endParaRPr lang="en-US"/>
           </a:p>
@@ -937,10 +946,9 @@
           </a:lstStyle>
           <a:p>
             <a:r>
-              <a:rPr lang="en-US" smtClean="0"/>
+              <a:rPr lang="en-US"/>
               <a:t>Click to edit Master title style</a:t>
             </a:r>
-            <a:endParaRPr lang="en-US"/>
           </a:p>
         </p:txBody>
       </p:sp>
@@ -1057,7 +1065,7 @@
           <a:p>
             <a:pPr lvl="0"/>
             <a:r>
-              <a:rPr lang="en-US" smtClean="0"/>
+              <a:rPr lang="en-US"/>
               <a:t>Click to edit Master text styles</a:t>
             </a:r>
           </a:p>
@@ -1080,7 +1088,7 @@
           <a:p>
             <a:fld id="{5BCAD085-E8A6-8845-BD4E-CB4CCA059FC4}" type="datetimeFigureOut">
               <a:rPr lang="en-US" smtClean="0"/>
-              <a:t>1/27/13</a:t>
+              <a:t>9/30/2026</a:t>
             </a:fld>
             <a:endParaRPr lang="en-US"/>
           </a:p>
@@ -1174,10 +1182,9 @@
           <a:lstStyle/>
           <a:p>
             <a:r>
-              <a:rPr lang="en-US" smtClean="0"/>
+              <a:rPr lang="en-US"/>
               <a:t>Click to edit Master title style</a:t>
             </a:r>
-            <a:endParaRPr lang="en-US"/>
           </a:p>
         </p:txBody>
       </p:sp>
@@ -1231,38 +1238,37 @@
           <a:p>
             <a:pPr lvl="0"/>
             <a:r>
-              <a:rPr lang="en-US" smtClean="0"/>
+              <a:rPr lang="en-US"/>
               <a:t>Click to edit Master text styles</a:t>
             </a:r>
           </a:p>
           <a:p>
             <a:pPr lvl="1"/>
             <a:r>
-              <a:rPr lang="en-US" smtClean="0"/>
+              <a:rPr lang="en-US"/>
               <a:t>Second level</a:t>
             </a:r>
           </a:p>
           <a:p>
             <a:pPr lvl="2"/>
             <a:r>
-              <a:rPr lang="en-US" smtClean="0"/>
+              <a:rPr lang="en-US"/>
               <a:t>Third level</a:t>
             </a:r>
           </a:p>
           <a:p>
             <a:pPr lvl="3"/>
             <a:r>
-              <a:rPr lang="en-US" smtClean="0"/>
+              <a:rPr lang="en-US"/>
               <a:t>Fourth level</a:t>
             </a:r>
           </a:p>
           <a:p>
             <a:pPr lvl="4"/>
             <a:r>
-              <a:rPr lang="en-US" smtClean="0"/>
+              <a:rPr lang="en-US"/>
               <a:t>Fifth level</a:t>
             </a:r>
-            <a:endParaRPr lang="en-US"/>
           </a:p>
         </p:txBody>
       </p:sp>
@@ -1316,38 +1322,37 @@
           <a:p>
             <a:pPr lvl="0"/>
             <a:r>
-              <a:rPr lang="en-US" smtClean="0"/>
+              <a:rPr lang="en-US"/>
               <a:t>Click to edit Master text styles</a:t>
             </a:r>
           </a:p>
           <a:p>
             <a:pPr lvl="1"/>
             <a:r>
-              <a:rPr lang="en-US" smtClean="0"/>
+              <a:rPr lang="en-US"/>
               <a:t>Second level</a:t>
             </a:r>
           </a:p>
           <a:p>
             <a:pPr lvl="2"/>
             <a:r>
-              <a:rPr lang="en-US" smtClean="0"/>
+              <a:rPr lang="en-US"/>
               <a:t>Third level</a:t>
             </a:r>
           </a:p>
           <a:p>
             <a:pPr lvl="3"/>
             <a:r>
-              <a:rPr lang="en-US" smtClean="0"/>
+              <a:rPr lang="en-US"/>
               <a:t>Fourth level</a:t>
             </a:r>
           </a:p>
           <a:p>
             <a:pPr lvl="4"/>
             <a:r>
-              <a:rPr lang="en-US" smtClean="0"/>
+              <a:rPr lang="en-US"/>
               <a:t>Fifth level</a:t>
             </a:r>
-            <a:endParaRPr lang="en-US"/>
           </a:p>
         </p:txBody>
       </p:sp>
@@ -1368,7 +1373,7 @@
           <a:p>
             <a:fld id="{5BCAD085-E8A6-8845-BD4E-CB4CCA059FC4}" type="datetimeFigureOut">
               <a:rPr lang="en-US" smtClean="0"/>
-              <a:t>1/27/13</a:t>
+              <a:t>9/30/2026</a:t>
             </a:fld>
             <a:endParaRPr lang="en-US"/>
           </a:p>
@@ -1466,10 +1471,9 @@
           </a:lstStyle>
           <a:p>
             <a:r>
-              <a:rPr lang="en-US" smtClean="0"/>
+              <a:rPr lang="en-US"/>
               <a:t>Click to edit Master title style</a:t>
             </a:r>
-            <a:endParaRPr lang="en-US"/>
           </a:p>
         </p:txBody>
       </p:sp>
@@ -1532,7 +1536,7 @@
           <a:p>
             <a:pPr lvl="0"/>
             <a:r>
-              <a:rPr lang="en-US" smtClean="0"/>
+              <a:rPr lang="en-US"/>
               <a:t>Click to edit Master text styles</a:t>
             </a:r>
           </a:p>
@@ -1588,38 +1592,37 @@
           <a:p>
             <a:pPr lvl="0"/>
             <a:r>
-              <a:rPr lang="en-US" smtClean="0"/>
+              <a:rPr lang="en-US"/>
               <a:t>Click to edit Master text styles</a:t>
             </a:r>
           </a:p>
           <a:p>
             <a:pPr lvl="1"/>
             <a:r>
-              <a:rPr lang="en-US" smtClean="0"/>
+              <a:rPr lang="en-US"/>
               <a:t>Second level</a:t>
             </a:r>
           </a:p>
           <a:p>
             <a:pPr lvl="2"/>
             <a:r>
-              <a:rPr lang="en-US" smtClean="0"/>
+              <a:rPr lang="en-US"/>
               <a:t>Third level</a:t>
             </a:r>
           </a:p>
           <a:p>
             <a:pPr lvl="3"/>
             <a:r>
-              <a:rPr lang="en-US" smtClean="0"/>
+              <a:rPr lang="en-US"/>
               <a:t>Fourth level</a:t>
             </a:r>
           </a:p>
           <a:p>
             <a:pPr lvl="4"/>
             <a:r>
-              <a:rPr lang="en-US" smtClean="0"/>
+              <a:rPr lang="en-US"/>
               <a:t>Fifth level</a:t>
             </a:r>
-            <a:endParaRPr lang="en-US"/>
           </a:p>
         </p:txBody>
       </p:sp>
@@ -1682,7 +1685,7 @@
           <a:p>
             <a:pPr lvl="0"/>
             <a:r>
-              <a:rPr lang="en-US" smtClean="0"/>
+              <a:rPr lang="en-US"/>
               <a:t>Click to edit Master text styles</a:t>
             </a:r>
           </a:p>
@@ -1738,38 +1741,37 @@
           <a:p>
             <a:pPr lvl="0"/>
             <a:r>
-              <a:rPr lang="en-US" smtClean="0"/>
+              <a:rPr lang="en-US"/>
               <a:t>Click to edit Master text styles</a:t>
             </a:r>
           </a:p>
           <a:p>
             <a:pPr lvl="1"/>
             <a:r>
-              <a:rPr lang="en-US" smtClean="0"/>
+              <a:rPr lang="en-US"/>
               <a:t>Second level</a:t>
             </a:r>
           </a:p>
           <a:p>
             <a:pPr lvl="2"/>
             <a:r>
-              <a:rPr lang="en-US" smtClean="0"/>
+              <a:rPr lang="en-US"/>
               <a:t>Third level</a:t>
             </a:r>
           </a:p>
           <a:p>
             <a:pPr lvl="3"/>
             <a:r>
-              <a:rPr lang="en-US" smtClean="0"/>
+              <a:rPr lang="en-US"/>
               <a:t>Fourth level</a:t>
             </a:r>
           </a:p>
           <a:p>
             <a:pPr lvl="4"/>
             <a:r>
-              <a:rPr lang="en-US" smtClean="0"/>
+              <a:rPr lang="en-US"/>
               <a:t>Fifth level</a:t>
             </a:r>
-            <a:endParaRPr lang="en-US"/>
           </a:p>
         </p:txBody>
       </p:sp>
@@ -1790,7 +1792,7 @@
           <a:p>
             <a:fld id="{5BCAD085-E8A6-8845-BD4E-CB4CCA059FC4}" type="datetimeFigureOut">
               <a:rPr lang="en-US" smtClean="0"/>
-              <a:t>1/27/13</a:t>
+              <a:t>9/30/2026</a:t>
             </a:fld>
             <a:endParaRPr lang="en-US"/>
           </a:p>
@@ -1884,10 +1886,9 @@
           <a:lstStyle/>
           <a:p>
             <a:r>
-              <a:rPr lang="en-US" smtClean="0"/>
+              <a:rPr lang="en-US"/>
               <a:t>Click to edit Master title style</a:t>
             </a:r>
-            <a:endParaRPr lang="en-US"/>
           </a:p>
         </p:txBody>
       </p:sp>
@@ -1908,7 +1909,7 @@
           <a:p>
             <a:fld id="{5BCAD085-E8A6-8845-BD4E-CB4CCA059FC4}" type="datetimeFigureOut">
               <a:rPr lang="en-US" smtClean="0"/>
-              <a:t>1/27/13</a:t>
+              <a:t>9/30/2026</a:t>
             </a:fld>
             <a:endParaRPr lang="en-US"/>
           </a:p>
@@ -2003,7 +2004,7 @@
           <a:p>
             <a:fld id="{5BCAD085-E8A6-8845-BD4E-CB4CCA059FC4}" type="datetimeFigureOut">
               <a:rPr lang="en-US" smtClean="0"/>
-              <a:t>1/27/13</a:t>
+              <a:t>9/30/2026</a:t>
             </a:fld>
             <a:endParaRPr lang="en-US"/>
           </a:p>
@@ -2106,10 +2107,9 @@
           </a:lstStyle>
           <a:p>
             <a:r>
-              <a:rPr lang="en-US" smtClean="0"/>
+              <a:rPr lang="en-US"/>
               <a:t>Click to edit Master title style</a:t>
             </a:r>
-            <a:endParaRPr lang="en-US"/>
           </a:p>
         </p:txBody>
       </p:sp>
@@ -2163,38 +2163,37 @@
           <a:p>
             <a:pPr lvl="0"/>
             <a:r>
-              <a:rPr lang="en-US" smtClean="0"/>
+              <a:rPr lang="en-US"/>
               <a:t>Click to edit Master text styles</a:t>
             </a:r>
           </a:p>
           <a:p>
             <a:pPr lvl="1"/>
             <a:r>
-              <a:rPr lang="en-US" smtClean="0"/>
+              <a:rPr lang="en-US"/>
               <a:t>Second level</a:t>
             </a:r>
           </a:p>
           <a:p>
             <a:pPr lvl="2"/>
             <a:r>
-              <a:rPr lang="en-US" smtClean="0"/>
+              <a:rPr lang="en-US"/>
               <a:t>Third level</a:t>
             </a:r>
           </a:p>
           <a:p>
             <a:pPr lvl="3"/>
             <a:r>
-              <a:rPr lang="en-US" smtClean="0"/>
+              <a:rPr lang="en-US"/>
               <a:t>Fourth level</a:t>
             </a:r>
           </a:p>
           <a:p>
             <a:pPr lvl="4"/>
             <a:r>
-              <a:rPr lang="en-US" smtClean="0"/>
+              <a:rPr lang="en-US"/>
               <a:t>Fifth level</a:t>
             </a:r>
-            <a:endParaRPr lang="en-US"/>
           </a:p>
         </p:txBody>
       </p:sp>
@@ -2257,7 +2256,7 @@
           <a:p>
             <a:pPr lvl="0"/>
             <a:r>
-              <a:rPr lang="en-US" smtClean="0"/>
+              <a:rPr lang="en-US"/>
               <a:t>Click to edit Master text styles</a:t>
             </a:r>
           </a:p>
@@ -2280,7 +2279,7 @@
           <a:p>
             <a:fld id="{5BCAD085-E8A6-8845-BD4E-CB4CCA059FC4}" type="datetimeFigureOut">
               <a:rPr lang="en-US" smtClean="0"/>
-              <a:t>1/27/13</a:t>
+              <a:t>9/30/2026</a:t>
             </a:fld>
             <a:endParaRPr lang="en-US"/>
           </a:p>
@@ -2383,10 +2382,9 @@
           </a:lstStyle>
           <a:p>
             <a:r>
-              <a:rPr lang="en-US" smtClean="0"/>
+              <a:rPr lang="en-US"/>
               <a:t>Click to edit Master title style</a:t>
             </a:r>
-            <a:endParaRPr lang="en-US"/>
           </a:p>
         </p:txBody>
       </p:sp>
@@ -2510,7 +2508,7 @@
           <a:p>
             <a:pPr lvl="0"/>
             <a:r>
-              <a:rPr lang="en-US" smtClean="0"/>
+              <a:rPr lang="en-US"/>
               <a:t>Click to edit Master text styles</a:t>
             </a:r>
           </a:p>
@@ -2533,7 +2531,7 @@
           <a:p>
             <a:fld id="{5BCAD085-E8A6-8845-BD4E-CB4CCA059FC4}" type="datetimeFigureOut">
               <a:rPr lang="en-US" smtClean="0"/>
-              <a:t>1/27/13</a:t>
+              <a:t>9/30/2026</a:t>
             </a:fld>
             <a:endParaRPr lang="en-US"/>
           </a:p>
@@ -2642,10 +2640,9 @@
           <a:lstStyle/>
           <a:p>
             <a:r>
-              <a:rPr lang="en-US" smtClean="0"/>
+              <a:rPr lang="en-US"/>
               <a:t>Click to edit Master title style</a:t>
             </a:r>
-            <a:endParaRPr lang="en-US"/>
           </a:p>
         </p:txBody>
       </p:sp>
@@ -2676,38 +2673,37 @@
           <a:p>
             <a:pPr lvl="0"/>
             <a:r>
-              <a:rPr lang="en-US" smtClean="0"/>
+              <a:rPr lang="en-US"/>
               <a:t>Click to edit Master text styles</a:t>
             </a:r>
           </a:p>
           <a:p>
             <a:pPr lvl="1"/>
             <a:r>
-              <a:rPr lang="en-US" smtClean="0"/>
+              <a:rPr lang="en-US"/>
               <a:t>Second level</a:t>
             </a:r>
           </a:p>
           <a:p>
             <a:pPr lvl="2"/>
             <a:r>
-              <a:rPr lang="en-US" smtClean="0"/>
+              <a:rPr lang="en-US"/>
               <a:t>Third level</a:t>
             </a:r>
           </a:p>
           <a:p>
             <a:pPr lvl="3"/>
             <a:r>
-              <a:rPr lang="en-US" smtClean="0"/>
+              <a:rPr lang="en-US"/>
               <a:t>Fourth level</a:t>
             </a:r>
           </a:p>
           <a:p>
             <a:pPr lvl="4"/>
             <a:r>
-              <a:rPr lang="en-US" smtClean="0"/>
+              <a:rPr lang="en-US"/>
               <a:t>Fifth level</a:t>
             </a:r>
-            <a:endParaRPr lang="en-US"/>
           </a:p>
         </p:txBody>
       </p:sp>
@@ -2746,7 +2742,7 @@
           <a:p>
             <a:fld id="{5BCAD085-E8A6-8845-BD4E-CB4CCA059FC4}" type="datetimeFigureOut">
               <a:rPr lang="en-US" smtClean="0"/>
-              <a:t>1/27/13</a:t>
+              <a:t>9/30/2026</a:t>
             </a:fld>
             <a:endParaRPr lang="en-US"/>
           </a:p>
@@ -3105,7 +3101,7 @@
 </file>
 
 <file path=ppt/slides/slide1.xml><?xml version="1.0" encoding="utf-8"?>
-<p:sld xmlns:a="http://schemas.openxmlformats.org/drawingml/2006/main" xmlns:p="http://schemas.openxmlformats.org/presentationml/2006/main" xmlns:r="http://schemas.openxmlformats.org/officeDocument/2006/relationships">
+<p:sld xmlns:a="http://schemas.openxmlformats.org/drawingml/2006/main" xmlns:r="http://schemas.openxmlformats.org/officeDocument/2006/relationships" xmlns:p="http://schemas.openxmlformats.org/presentationml/2006/main">
   <p:cSld>
     <p:spTree>
       <p:nvGrpSpPr>
@@ -3113,7 +3109,14 @@
         <p:cNvGrpSpPr/>
         <p:nvPr/>
       </p:nvGrpSpPr>
-      <p:grpSpPr/>
+      <p:grpSpPr>
+        <a:xfrm>
+          <a:off x="0" y="0"/>
+          <a:ext cx="0" cy="0"/>
+          <a:chOff x="0" y="0"/>
+          <a:chExt cx="0" cy="0"/>
+        </a:xfrm>
+      </p:grpSpPr>
       <p:sp>
         <p:nvSpPr>
           <p:cNvPr id="2" name="Rectangle 1"/>
@@ -3154,6 +3157,7 @@
           <a:lstStyle/>
           <a:p>
             <a:pPr algn="ctr"/>
+            <a:endParaRPr/>
           </a:p>
         </p:txBody>
       </p:sp>
@@ -3197,6 +3201,7 @@
           <a:lstStyle/>
           <a:p>
             <a:pPr algn="ctr"/>
+            <a:endParaRPr/>
           </a:p>
         </p:txBody>
       </p:sp>
@@ -3349,7 +3354,7 @@
 </file>
 
 <file path=ppt/slides/slide10.xml><?xml version="1.0" encoding="utf-8"?>
-<p:sld xmlns:a="http://schemas.openxmlformats.org/drawingml/2006/main" xmlns:p="http://schemas.openxmlformats.org/presentationml/2006/main" xmlns:r="http://schemas.openxmlformats.org/officeDocument/2006/relationships">
+<p:sld xmlns:a="http://schemas.openxmlformats.org/drawingml/2006/main" xmlns:r="http://schemas.openxmlformats.org/officeDocument/2006/relationships" xmlns:p="http://schemas.openxmlformats.org/presentationml/2006/main">
   <p:cSld>
     <p:spTree>
       <p:nvGrpSpPr>
@@ -3357,7 +3362,14 @@
         <p:cNvGrpSpPr/>
         <p:nvPr/>
       </p:nvGrpSpPr>
-      <p:grpSpPr/>
+      <p:grpSpPr>
+        <a:xfrm>
+          <a:off x="0" y="0"/>
+          <a:ext cx="0" cy="0"/>
+          <a:chOff x="0" y="0"/>
+          <a:chExt cx="0" cy="0"/>
+        </a:xfrm>
+      </p:grpSpPr>
       <p:sp>
         <p:nvSpPr>
           <p:cNvPr id="2" name="Rectangle 1"/>
@@ -3398,6 +3410,7 @@
           <a:lstStyle/>
           <a:p>
             <a:pPr algn="ctr"/>
+            <a:endParaRPr/>
           </a:p>
         </p:txBody>
       </p:sp>
@@ -3589,7 +3602,7 @@
 </file>
 
 <file path=ppt/slides/slide11.xml><?xml version="1.0" encoding="utf-8"?>
-<p:sld xmlns:a="http://schemas.openxmlformats.org/drawingml/2006/main" xmlns:p="http://schemas.openxmlformats.org/presentationml/2006/main" xmlns:r="http://schemas.openxmlformats.org/officeDocument/2006/relationships">
+<p:sld xmlns:a="http://schemas.openxmlformats.org/drawingml/2006/main" xmlns:r="http://schemas.openxmlformats.org/officeDocument/2006/relationships" xmlns:p="http://schemas.openxmlformats.org/presentationml/2006/main">
   <p:cSld>
     <p:spTree>
       <p:nvGrpSpPr>
@@ -3597,7 +3610,14 @@
         <p:cNvGrpSpPr/>
         <p:nvPr/>
       </p:nvGrpSpPr>
-      <p:grpSpPr/>
+      <p:grpSpPr>
+        <a:xfrm>
+          <a:off x="0" y="0"/>
+          <a:ext cx="0" cy="0"/>
+          <a:chOff x="0" y="0"/>
+          <a:chExt cx="0" cy="0"/>
+        </a:xfrm>
+      </p:grpSpPr>
       <p:sp>
         <p:nvSpPr>
           <p:cNvPr id="2" name="Rectangle 1"/>
@@ -3638,6 +3658,7 @@
           <a:lstStyle/>
           <a:p>
             <a:pPr algn="ctr"/>
+            <a:endParaRPr/>
           </a:p>
         </p:txBody>
       </p:sp>
@@ -3829,7 +3850,7 @@
 </file>
 
 <file path=ppt/slides/slide12.xml><?xml version="1.0" encoding="utf-8"?>
-<p:sld xmlns:a="http://schemas.openxmlformats.org/drawingml/2006/main" xmlns:p="http://schemas.openxmlformats.org/presentationml/2006/main" xmlns:r="http://schemas.openxmlformats.org/officeDocument/2006/relationships">
+<p:sld xmlns:a="http://schemas.openxmlformats.org/drawingml/2006/main" xmlns:r="http://schemas.openxmlformats.org/officeDocument/2006/relationships" xmlns:p="http://schemas.openxmlformats.org/presentationml/2006/main">
   <p:cSld>
     <p:spTree>
       <p:nvGrpSpPr>
@@ -3837,7 +3858,14 @@
         <p:cNvGrpSpPr/>
         <p:nvPr/>
       </p:nvGrpSpPr>
-      <p:grpSpPr/>
+      <p:grpSpPr>
+        <a:xfrm>
+          <a:off x="0" y="0"/>
+          <a:ext cx="0" cy="0"/>
+          <a:chOff x="0" y="0"/>
+          <a:chExt cx="0" cy="0"/>
+        </a:xfrm>
+      </p:grpSpPr>
       <p:sp>
         <p:nvSpPr>
           <p:cNvPr id="2" name="Rectangle 1"/>
@@ -3878,6 +3906,7 @@
           <a:lstStyle/>
           <a:p>
             <a:pPr algn="ctr"/>
+            <a:endParaRPr/>
           </a:p>
         </p:txBody>
       </p:sp>
@@ -4049,7 +4078,7 @@
 </file>
 
 <file path=ppt/slides/slide13.xml><?xml version="1.0" encoding="utf-8"?>
-<p:sld xmlns:a="http://schemas.openxmlformats.org/drawingml/2006/main" xmlns:p="http://schemas.openxmlformats.org/presentationml/2006/main" xmlns:r="http://schemas.openxmlformats.org/officeDocument/2006/relationships">
+<p:sld xmlns:a="http://schemas.openxmlformats.org/drawingml/2006/main" xmlns:r="http://schemas.openxmlformats.org/officeDocument/2006/relationships" xmlns:p="http://schemas.openxmlformats.org/presentationml/2006/main">
   <p:cSld>
     <p:spTree>
       <p:nvGrpSpPr>
@@ -4057,7 +4086,14 @@
         <p:cNvGrpSpPr/>
         <p:nvPr/>
       </p:nvGrpSpPr>
-      <p:grpSpPr/>
+      <p:grpSpPr>
+        <a:xfrm>
+          <a:off x="0" y="0"/>
+          <a:ext cx="0" cy="0"/>
+          <a:chOff x="0" y="0"/>
+          <a:chExt cx="0" cy="0"/>
+        </a:xfrm>
+      </p:grpSpPr>
       <p:sp>
         <p:nvSpPr>
           <p:cNvPr id="2" name="Rectangle 1"/>
@@ -4098,6 +4134,7 @@
           <a:lstStyle/>
           <a:p>
             <a:pPr algn="ctr"/>
+            <a:endParaRPr/>
           </a:p>
         </p:txBody>
       </p:sp>
@@ -4253,7 +4290,7 @@
 </file>
 
 <file path=ppt/slides/slide14.xml><?xml version="1.0" encoding="utf-8"?>
-<p:sld xmlns:a="http://schemas.openxmlformats.org/drawingml/2006/main" xmlns:p="http://schemas.openxmlformats.org/presentationml/2006/main" xmlns:r="http://schemas.openxmlformats.org/officeDocument/2006/relationships">
+<p:sld xmlns:a="http://schemas.openxmlformats.org/drawingml/2006/main" xmlns:r="http://schemas.openxmlformats.org/officeDocument/2006/relationships" xmlns:p="http://schemas.openxmlformats.org/presentationml/2006/main">
   <p:cSld>
     <p:spTree>
       <p:nvGrpSpPr>
@@ -4261,7 +4298,14 @@
         <p:cNvGrpSpPr/>
         <p:nvPr/>
       </p:nvGrpSpPr>
-      <p:grpSpPr/>
+      <p:grpSpPr>
+        <a:xfrm>
+          <a:off x="0" y="0"/>
+          <a:ext cx="0" cy="0"/>
+          <a:chOff x="0" y="0"/>
+          <a:chExt cx="0" cy="0"/>
+        </a:xfrm>
+      </p:grpSpPr>
       <p:sp>
         <p:nvSpPr>
           <p:cNvPr id="2" name="Rectangle 1"/>
@@ -4302,6 +4346,7 @@
           <a:lstStyle/>
           <a:p>
             <a:pPr algn="ctr"/>
+            <a:endParaRPr/>
           </a:p>
         </p:txBody>
       </p:sp>
@@ -4408,6 +4453,11 @@
             </a:pPr>
             <a:r>
               <a:t>Σx＝？　n＝？　x̄＝？</a:t>
+            </a:r>
+          </a:p>
+          <a:p>
+            <a:r>
+              <a:t>答案：Σx＝20，n＝5，x̄＝20÷5＝4（筆）</a:t>
             </a:r>
           </a:p>
         </p:txBody>
@@ -4457,7 +4507,7 @@
 </file>
 
 <file path=ppt/slides/slide15.xml><?xml version="1.0" encoding="utf-8"?>
-<p:sld xmlns:a="http://schemas.openxmlformats.org/drawingml/2006/main" xmlns:p="http://schemas.openxmlformats.org/presentationml/2006/main" xmlns:r="http://schemas.openxmlformats.org/officeDocument/2006/relationships">
+<p:sld xmlns:a="http://schemas.openxmlformats.org/drawingml/2006/main" xmlns:r="http://schemas.openxmlformats.org/officeDocument/2006/relationships" xmlns:p="http://schemas.openxmlformats.org/presentationml/2006/main">
   <p:cSld>
     <p:spTree>
       <p:nvGrpSpPr>
@@ -4465,7 +4515,14 @@
         <p:cNvGrpSpPr/>
         <p:nvPr/>
       </p:nvGrpSpPr>
-      <p:grpSpPr/>
+      <p:grpSpPr>
+        <a:xfrm>
+          <a:off x="0" y="0"/>
+          <a:ext cx="0" cy="0"/>
+          <a:chOff x="0" y="0"/>
+          <a:chExt cx="0" cy="0"/>
+        </a:xfrm>
+      </p:grpSpPr>
       <p:sp>
         <p:nvSpPr>
           <p:cNvPr id="2" name="Rectangle 1"/>
@@ -4506,6 +4563,7 @@
           <a:lstStyle/>
           <a:p>
             <a:pPr algn="ctr"/>
+            <a:endParaRPr/>
           </a:p>
         </p:txBody>
       </p:sp>
@@ -4540,7 +4598,7 @@
               </a:defRPr>
             </a:pPr>
             <a:r>
-              <a:t>3｜分組資料也能算平均數嗎？</a:t>
+              <a:t>重要特性｜不同人數的兩組，不能直接平均</a:t>
             </a:r>
           </a:p>
         </p:txBody>
@@ -4554,7 +4612,7 @@
         <p:spPr>
           <a:xfrm>
             <a:off x="685800" y="1234440"/>
-            <a:ext cx="10789920" cy="4937760"/>
+            <a:ext cx="10789920" cy="2459519"/>
           </a:xfrm>
           <a:prstGeom prst="rect">
             <a:avLst/>
@@ -4567,7 +4625,10 @@
           </a:bodyPr>
           <a:lstStyle/>
           <a:p>
-            <a:pPr>
+            <a:pPr algn="just">
+              <a:lnSpc>
+                <a:spcPct val="150000"/>
+              </a:lnSpc>
               <a:spcAft>
                 <a:spcPts val="900"/>
               </a:spcAft>
@@ -4579,40 +4640,212 @@
               </a:defRPr>
             </a:pPr>
             <a:r>
-              <a:t>可以，但我們已經看不到每一筆原始資料。</a:t>
-            </a:r>
-          </a:p>
-          <a:p>
-            <a:pPr>
-              <a:spcAft>
-                <a:spcPts val="900"/>
-              </a:spcAft>
-              <a:defRPr sz="2000">
-                <a:solidFill>
-                  <a:srgbClr val="2D2D2D"/>
-                </a:solidFill>
-                <a:latin typeface="Microsoft JhengHei"/>
-              </a:defRPr>
-            </a:pPr>
-            <a:r>
-              <a:t>舊教材的作法：以各組「組中點」代表該組所有資料。</a:t>
-            </a:r>
-          </a:p>
-          <a:p>
-            <a:pPr>
-              <a:spcAft>
-                <a:spcPts val="900"/>
-              </a:spcAft>
-              <a:defRPr sz="2000">
-                <a:solidFill>
-                  <a:srgbClr val="2D2D2D"/>
-                </a:solidFill>
-                <a:latin typeface="Microsoft JhengHei"/>
-              </a:defRPr>
-            </a:pPr>
-            <a:r>
-              <a:t>因此分組資料算出的平均數通常是原始資料平均數的近似值。</a:t>
-            </a:r>
+              <a:rPr lang="zh-TW" altLang="en-US" sz="2000" dirty="0">
+                <a:latin typeface="微軟正黑體" panose="020B0604030504040204" pitchFamily="34" charset="-120"/>
+                <a:ea typeface="微軟正黑體" panose="020B0604030504040204" pitchFamily="34" charset="-120"/>
+              </a:rPr>
+              <a:t>甲班 </a:t>
+            </a:r>
+            <a:r>
+              <a:rPr lang="en-US" altLang="zh-TW" sz="2000" dirty="0">
+                <a:latin typeface="微軟正黑體" panose="020B0604030504040204" pitchFamily="34" charset="-120"/>
+                <a:ea typeface="微軟正黑體" panose="020B0604030504040204" pitchFamily="34" charset="-120"/>
+              </a:rPr>
+              <a:t>40 </a:t>
+            </a:r>
+            <a:r>
+              <a:rPr lang="zh-TW" altLang="en-US" sz="2000" dirty="0">
+                <a:latin typeface="微軟正黑體" panose="020B0604030504040204" pitchFamily="34" charset="-120"/>
+                <a:ea typeface="微軟正黑體" panose="020B0604030504040204" pitchFamily="34" charset="-120"/>
+              </a:rPr>
+              <a:t>人，平均 </a:t>
+            </a:r>
+            <a:r>
+              <a:rPr lang="en-US" altLang="zh-TW" sz="2000" dirty="0">
+                <a:latin typeface="微軟正黑體" panose="020B0604030504040204" pitchFamily="34" charset="-120"/>
+                <a:ea typeface="微軟正黑體" panose="020B0604030504040204" pitchFamily="34" charset="-120"/>
+              </a:rPr>
+              <a:t>75 </a:t>
+            </a:r>
+            <a:r>
+              <a:rPr lang="zh-TW" altLang="en-US" sz="2000" dirty="0">
+                <a:latin typeface="微軟正黑體" panose="020B0604030504040204" pitchFamily="34" charset="-120"/>
+                <a:ea typeface="微軟正黑體" panose="020B0604030504040204" pitchFamily="34" charset="-120"/>
+              </a:rPr>
+              <a:t>分；乙班 </a:t>
+            </a:r>
+            <a:r>
+              <a:rPr lang="en-US" altLang="zh-TW" sz="2000" dirty="0">
+                <a:latin typeface="微軟正黑體" panose="020B0604030504040204" pitchFamily="34" charset="-120"/>
+                <a:ea typeface="微軟正黑體" panose="020B0604030504040204" pitchFamily="34" charset="-120"/>
+              </a:rPr>
+              <a:t>60 </a:t>
+            </a:r>
+            <a:r>
+              <a:rPr lang="zh-TW" altLang="en-US" sz="2000" dirty="0">
+                <a:latin typeface="微軟正黑體" panose="020B0604030504040204" pitchFamily="34" charset="-120"/>
+                <a:ea typeface="微軟正黑體" panose="020B0604030504040204" pitchFamily="34" charset="-120"/>
+              </a:rPr>
+              <a:t>人，平均 </a:t>
+            </a:r>
+            <a:r>
+              <a:rPr lang="en-US" altLang="zh-TW" sz="2000" dirty="0">
+                <a:latin typeface="微軟正黑體" panose="020B0604030504040204" pitchFamily="34" charset="-120"/>
+                <a:ea typeface="微軟正黑體" panose="020B0604030504040204" pitchFamily="34" charset="-120"/>
+              </a:rPr>
+              <a:t>80 </a:t>
+            </a:r>
+            <a:r>
+              <a:rPr lang="zh-TW" altLang="en-US" sz="2000" dirty="0">
+                <a:latin typeface="微軟正黑體" panose="020B0604030504040204" pitchFamily="34" charset="-120"/>
+                <a:ea typeface="微軟正黑體" panose="020B0604030504040204" pitchFamily="34" charset="-120"/>
+              </a:rPr>
+              <a:t>分。</a:t>
+            </a:r>
+          </a:p>
+          <a:p>
+            <a:pPr algn="just">
+              <a:lnSpc>
+                <a:spcPct val="150000"/>
+              </a:lnSpc>
+            </a:pPr>
+            <a:r>
+              <a:rPr lang="zh-TW" altLang="en-US" sz="2000" dirty="0">
+                <a:latin typeface="微軟正黑體" panose="020B0604030504040204" pitchFamily="34" charset="-120"/>
+                <a:ea typeface="微軟正黑體" panose="020B0604030504040204" pitchFamily="34" charset="-120"/>
+              </a:rPr>
+              <a:t>兩班合起來的平均是多少？</a:t>
+            </a:r>
+          </a:p>
+          <a:p>
+            <a:pPr algn="just">
+              <a:lnSpc>
+                <a:spcPct val="150000"/>
+              </a:lnSpc>
+            </a:pPr>
+            <a:r>
+              <a:rPr lang="zh-TW" altLang="en-US" sz="2000" dirty="0">
+                <a:latin typeface="微軟正黑體" panose="020B0604030504040204" pitchFamily="34" charset="-120"/>
+                <a:ea typeface="微軟正黑體" panose="020B0604030504040204" pitchFamily="34" charset="-120"/>
+              </a:rPr>
+              <a:t>不能直接算 </a:t>
+            </a:r>
+            <a:r>
+              <a:rPr lang="en-US" altLang="zh-TW" sz="2000" dirty="0">
+                <a:latin typeface="微軟正黑體" panose="020B0604030504040204" pitchFamily="34" charset="-120"/>
+                <a:ea typeface="微軟正黑體" panose="020B0604030504040204" pitchFamily="34" charset="-120"/>
+              </a:rPr>
+              <a:t>(75</a:t>
+            </a:r>
+            <a:r>
+              <a:rPr lang="zh-TW" altLang="en-US" sz="2000" dirty="0">
+                <a:latin typeface="微軟正黑體" panose="020B0604030504040204" pitchFamily="34" charset="-120"/>
+                <a:ea typeface="微軟正黑體" panose="020B0604030504040204" pitchFamily="34" charset="-120"/>
+              </a:rPr>
+              <a:t>＋</a:t>
+            </a:r>
+            <a:r>
+              <a:rPr lang="en-US" altLang="zh-TW" sz="2000" dirty="0">
+                <a:latin typeface="微軟正黑體" panose="020B0604030504040204" pitchFamily="34" charset="-120"/>
+                <a:ea typeface="微軟正黑體" panose="020B0604030504040204" pitchFamily="34" charset="-120"/>
+              </a:rPr>
+              <a:t>80)÷2</a:t>
+            </a:r>
+            <a:r>
+              <a:rPr lang="zh-TW" altLang="en-US" sz="2000" dirty="0">
+                <a:latin typeface="微軟正黑體" panose="020B0604030504040204" pitchFamily="34" charset="-120"/>
+                <a:ea typeface="微軟正黑體" panose="020B0604030504040204" pitchFamily="34" charset="-120"/>
+              </a:rPr>
+              <a:t>，因為兩班人數不同。</a:t>
+            </a:r>
+          </a:p>
+          <a:p>
+            <a:pPr algn="just">
+              <a:lnSpc>
+                <a:spcPct val="150000"/>
+              </a:lnSpc>
+            </a:pPr>
+            <a:r>
+              <a:rPr lang="zh-TW" altLang="en-US" sz="2000" dirty="0">
+                <a:latin typeface="微軟正黑體" panose="020B0604030504040204" pitchFamily="34" charset="-120"/>
+                <a:ea typeface="微軟正黑體" panose="020B0604030504040204" pitchFamily="34" charset="-120"/>
+              </a:rPr>
+              <a:t>總平均＝</a:t>
+            </a:r>
+            <a:r>
+              <a:rPr lang="en-US" altLang="zh-TW" sz="2000" dirty="0">
+                <a:latin typeface="微軟正黑體" panose="020B0604030504040204" pitchFamily="34" charset="-120"/>
+                <a:ea typeface="微軟正黑體" panose="020B0604030504040204" pitchFamily="34" charset="-120"/>
+              </a:rPr>
+              <a:t>(40×75</a:t>
+            </a:r>
+            <a:r>
+              <a:rPr lang="zh-TW" altLang="en-US" sz="2000" dirty="0">
+                <a:latin typeface="微軟正黑體" panose="020B0604030504040204" pitchFamily="34" charset="-120"/>
+                <a:ea typeface="微軟正黑體" panose="020B0604030504040204" pitchFamily="34" charset="-120"/>
+              </a:rPr>
+              <a:t>＋</a:t>
+            </a:r>
+            <a:r>
+              <a:rPr lang="en-US" altLang="zh-TW" sz="2000" dirty="0">
+                <a:latin typeface="微軟正黑體" panose="020B0604030504040204" pitchFamily="34" charset="-120"/>
+                <a:ea typeface="微軟正黑體" panose="020B0604030504040204" pitchFamily="34" charset="-120"/>
+              </a:rPr>
+              <a:t>60×80)÷(40</a:t>
+            </a:r>
+            <a:r>
+              <a:rPr lang="zh-TW" altLang="en-US" sz="2000" dirty="0">
+                <a:latin typeface="微軟正黑體" panose="020B0604030504040204" pitchFamily="34" charset="-120"/>
+                <a:ea typeface="微軟正黑體" panose="020B0604030504040204" pitchFamily="34" charset="-120"/>
+              </a:rPr>
+              <a:t>＋</a:t>
+            </a:r>
+            <a:r>
+              <a:rPr lang="en-US" altLang="zh-TW" sz="2000" dirty="0">
+                <a:latin typeface="微軟正黑體" panose="020B0604030504040204" pitchFamily="34" charset="-120"/>
+                <a:ea typeface="微軟正黑體" panose="020B0604030504040204" pitchFamily="34" charset="-120"/>
+              </a:rPr>
+              <a:t>60)</a:t>
+            </a:r>
+            <a:r>
+              <a:rPr lang="zh-TW" altLang="en-US" sz="2000" dirty="0">
+                <a:latin typeface="微軟正黑體" panose="020B0604030504040204" pitchFamily="34" charset="-120"/>
+                <a:ea typeface="微軟正黑體" panose="020B0604030504040204" pitchFamily="34" charset="-120"/>
+              </a:rPr>
+              <a:t>＝</a:t>
+            </a:r>
+            <a:r>
+              <a:rPr lang="en-US" altLang="zh-TW" sz="2000" dirty="0">
+                <a:latin typeface="微軟正黑體" panose="020B0604030504040204" pitchFamily="34" charset="-120"/>
+                <a:ea typeface="微軟正黑體" panose="020B0604030504040204" pitchFamily="34" charset="-120"/>
+              </a:rPr>
+              <a:t>78</a:t>
+            </a:r>
+            <a:r>
+              <a:rPr lang="zh-TW" altLang="en-US" sz="2000" dirty="0">
+                <a:latin typeface="微軟正黑體" panose="020B0604030504040204" pitchFamily="34" charset="-120"/>
+                <a:ea typeface="微軟正黑體" panose="020B0604030504040204" pitchFamily="34" charset="-120"/>
+              </a:rPr>
+              <a:t>（分）</a:t>
+            </a:r>
+          </a:p>
+          <a:p>
+            <a:pPr algn="just">
+              <a:lnSpc>
+                <a:spcPct val="150000"/>
+              </a:lnSpc>
+            </a:pPr>
+            <a:r>
+              <a:rPr lang="zh-TW" altLang="en-US" sz="2000" dirty="0">
+                <a:latin typeface="微軟正黑體" panose="020B0604030504040204" pitchFamily="34" charset="-120"/>
+                <a:ea typeface="微軟正黑體" panose="020B0604030504040204" pitchFamily="34" charset="-120"/>
+              </a:rPr>
+              <a:t>重點：各組人數不同時，要依各組人數加權。</a:t>
+            </a:r>
+            <a:endParaRPr sz="2000" dirty="0">
+              <a:latin typeface="微軟正黑體" panose="020B0604030504040204" pitchFamily="34" charset="-120"/>
+              <a:ea typeface="微軟正黑體" panose="020B0604030504040204" pitchFamily="34" charset="-120"/>
+            </a:endParaRPr>
           </a:p>
         </p:txBody>
       </p:sp>
@@ -4661,7 +4894,7 @@
 </file>
 
 <file path=ppt/slides/slide16.xml><?xml version="1.0" encoding="utf-8"?>
-<p:sld xmlns:a="http://schemas.openxmlformats.org/drawingml/2006/main" xmlns:p="http://schemas.openxmlformats.org/presentationml/2006/main" xmlns:r="http://schemas.openxmlformats.org/officeDocument/2006/relationships">
+<p:sld xmlns:a="http://schemas.openxmlformats.org/drawingml/2006/main" xmlns:r="http://schemas.openxmlformats.org/officeDocument/2006/relationships" xmlns:p="http://schemas.openxmlformats.org/presentationml/2006/main">
   <p:cSld>
     <p:spTree>
       <p:nvGrpSpPr>
@@ -4669,7 +4902,14 @@
         <p:cNvGrpSpPr/>
         <p:nvPr/>
       </p:nvGrpSpPr>
-      <p:grpSpPr/>
+      <p:grpSpPr>
+        <a:xfrm>
+          <a:off x="0" y="0"/>
+          <a:ext cx="0" cy="0"/>
+          <a:chOff x="0" y="0"/>
+          <a:chExt cx="0" cy="0"/>
+        </a:xfrm>
+      </p:grpSpPr>
       <p:sp>
         <p:nvSpPr>
           <p:cNvPr id="2" name="Rectangle 1"/>
@@ -4710,6 +4950,7 @@
           <a:lstStyle/>
           <a:p>
             <a:pPr algn="ctr"/>
+            <a:endParaRPr/>
           </a:p>
         </p:txBody>
       </p:sp>
@@ -4744,7 +4985,7 @@
               </a:defRPr>
             </a:pPr>
             <a:r>
-              <a:t>組中點怎麼找？</a:t>
+              <a:t>3｜分組資料也能算平均數嗎？</a:t>
             </a:r>
           </a:p>
         </p:txBody>
@@ -4783,7 +5024,7 @@
               </a:defRPr>
             </a:pPr>
             <a:r>
-              <a:t>組中點 m＝（下界＋上界）÷ 2</a:t>
+              <a:t>可以，但我們已經看不到每一筆原始資料。</a:t>
             </a:r>
           </a:p>
           <a:p>
@@ -4799,7 +5040,7 @@
               </a:defRPr>
             </a:pPr>
             <a:r>
-              <a:t>例如 40–50 的組中點＝45。</a:t>
+              <a:t>分組資料的作法：以各組「組中點」代表該組所有資料。</a:t>
             </a:r>
           </a:p>
           <a:p>
@@ -4815,23 +5056,7 @@
               </a:defRPr>
             </a:pPr>
             <a:r>
-              <a:t>50–60 的組中點＝55。</a:t>
-            </a:r>
-          </a:p>
-          <a:p>
-            <a:pPr>
-              <a:spcAft>
-                <a:spcPts val="900"/>
-              </a:spcAft>
-              <a:defRPr sz="2000">
-                <a:solidFill>
-                  <a:srgbClr val="2D2D2D"/>
-                </a:solidFill>
-                <a:latin typeface="Microsoft JhengHei"/>
-              </a:defRPr>
-            </a:pPr>
-            <a:r>
-              <a:t>接著用組中點乘上該組次數。</a:t>
+              <a:t>因此分組資料算出的平均數通常是原始資料平均數的近似值。</a:t>
             </a:r>
           </a:p>
         </p:txBody>
@@ -4881,7 +5106,7 @@
 </file>
 
 <file path=ppt/slides/slide17.xml><?xml version="1.0" encoding="utf-8"?>
-<p:sld xmlns:a="http://schemas.openxmlformats.org/drawingml/2006/main" xmlns:p="http://schemas.openxmlformats.org/presentationml/2006/main" xmlns:r="http://schemas.openxmlformats.org/officeDocument/2006/relationships">
+<p:sld xmlns:a="http://schemas.openxmlformats.org/drawingml/2006/main" xmlns:r="http://schemas.openxmlformats.org/officeDocument/2006/relationships" xmlns:p="http://schemas.openxmlformats.org/presentationml/2006/main">
   <p:cSld>
     <p:spTree>
       <p:nvGrpSpPr>
@@ -4889,7 +5114,14 @@
         <p:cNvGrpSpPr/>
         <p:nvPr/>
       </p:nvGrpSpPr>
-      <p:grpSpPr/>
+      <p:grpSpPr>
+        <a:xfrm>
+          <a:off x="0" y="0"/>
+          <a:ext cx="0" cy="0"/>
+          <a:chOff x="0" y="0"/>
+          <a:chExt cx="0" cy="0"/>
+        </a:xfrm>
+      </p:grpSpPr>
       <p:sp>
         <p:nvSpPr>
           <p:cNvPr id="2" name="Rectangle 1"/>
@@ -4930,6 +5162,7 @@
           <a:lstStyle/>
           <a:p>
             <a:pPr algn="ctr"/>
+            <a:endParaRPr/>
           </a:p>
         </p:txBody>
       </p:sp>
@@ -4964,32 +5197,178 @@
               </a:defRPr>
             </a:pPr>
             <a:r>
-              <a:t>分組資料平均數｜計算公式</a:t>
-            </a:r>
-          </a:p>
-        </p:txBody>
-      </p:sp>
-      <p:sp>
-        <p:nvSpPr>
-          <p:cNvPr id="4" name="Rounded Rectangle 3"/>
+              <a:t>組中點怎麼找？</a:t>
+            </a:r>
+          </a:p>
+        </p:txBody>
+      </p:sp>
+      <p:sp>
+        <p:nvSpPr>
+          <p:cNvPr id="4" name="TextBox 3"/>
+          <p:cNvSpPr txBox="1"/>
+          <p:nvPr/>
+        </p:nvSpPr>
+        <p:spPr>
+          <a:xfrm>
+            <a:off x="685800" y="1234440"/>
+            <a:ext cx="10789920" cy="4937760"/>
+          </a:xfrm>
+          <a:prstGeom prst="rect">
+            <a:avLst/>
+          </a:prstGeom>
+          <a:noFill/>
+        </p:spPr>
+        <p:txBody>
+          <a:bodyPr wrap="square">
+            <a:spAutoFit/>
+          </a:bodyPr>
+          <a:lstStyle/>
+          <a:p>
+            <a:pPr>
+              <a:spcAft>
+                <a:spcPts val="900"/>
+              </a:spcAft>
+              <a:defRPr sz="2000">
+                <a:solidFill>
+                  <a:srgbClr val="2D2D2D"/>
+                </a:solidFill>
+                <a:latin typeface="Microsoft JhengHei"/>
+              </a:defRPr>
+            </a:pPr>
+            <a:r>
+              <a:t>組中點 m＝（下界＋上界）÷ 2</a:t>
+            </a:r>
+          </a:p>
+          <a:p>
+            <a:pPr>
+              <a:spcAft>
+                <a:spcPts val="900"/>
+              </a:spcAft>
+              <a:defRPr sz="2000">
+                <a:solidFill>
+                  <a:srgbClr val="2D2D2D"/>
+                </a:solidFill>
+                <a:latin typeface="Microsoft JhengHei"/>
+              </a:defRPr>
+            </a:pPr>
+            <a:r>
+              <a:t>例如 40–50 的組中點＝45。</a:t>
+            </a:r>
+          </a:p>
+          <a:p>
+            <a:pPr>
+              <a:spcAft>
+                <a:spcPts val="900"/>
+              </a:spcAft>
+              <a:defRPr sz="2000">
+                <a:solidFill>
+                  <a:srgbClr val="2D2D2D"/>
+                </a:solidFill>
+                <a:latin typeface="Microsoft JhengHei"/>
+              </a:defRPr>
+            </a:pPr>
+            <a:r>
+              <a:t>50–60 的組中點＝55。</a:t>
+            </a:r>
+          </a:p>
+          <a:p>
+            <a:pPr>
+              <a:spcAft>
+                <a:spcPts val="900"/>
+              </a:spcAft>
+              <a:defRPr sz="2000">
+                <a:solidFill>
+                  <a:srgbClr val="2D2D2D"/>
+                </a:solidFill>
+                <a:latin typeface="Microsoft JhengHei"/>
+              </a:defRPr>
+            </a:pPr>
+            <a:r>
+              <a:t>接著用組中點乘上該組次數。</a:t>
+            </a:r>
+          </a:p>
+        </p:txBody>
+      </p:sp>
+      <p:sp>
+        <p:nvSpPr>
+          <p:cNvPr id="5" name="TextBox 4"/>
+          <p:cNvSpPr txBox="1"/>
+          <p:nvPr/>
+        </p:nvSpPr>
+        <p:spPr>
+          <a:xfrm>
+            <a:off x="10789920" y="6473952"/>
+            <a:ext cx="822960" cy="201168"/>
+          </a:xfrm>
+          <a:prstGeom prst="rect">
+            <a:avLst/>
+          </a:prstGeom>
+          <a:noFill/>
+        </p:spPr>
+        <p:txBody>
+          <a:bodyPr wrap="none">
+            <a:spAutoFit/>
+          </a:bodyPr>
+          <a:lstStyle/>
+          <a:p>
+            <a:pPr algn="r">
+              <a:defRPr sz="900">
+                <a:solidFill>
+                  <a:srgbClr val="6E6E6E"/>
+                </a:solidFill>
+                <a:latin typeface="Microsoft JhengHei"/>
+              </a:defRPr>
+            </a:pPr>
+            <a:r>
+              <a:t>W03 | 17</a:t>
+            </a:r>
+          </a:p>
+        </p:txBody>
+      </p:sp>
+    </p:spTree>
+  </p:cSld>
+  <p:clrMapOvr>
+    <a:masterClrMapping/>
+  </p:clrMapOvr>
+</p:sld>
+</file>
+
+<file path=ppt/slides/slide18.xml><?xml version="1.0" encoding="utf-8"?>
+<p:sld xmlns:a="http://schemas.openxmlformats.org/drawingml/2006/main" xmlns:r="http://schemas.openxmlformats.org/officeDocument/2006/relationships" xmlns:p="http://schemas.openxmlformats.org/presentationml/2006/main">
+  <p:cSld>
+    <p:spTree>
+      <p:nvGrpSpPr>
+        <p:cNvPr id="1" name=""/>
+        <p:cNvGrpSpPr/>
+        <p:nvPr/>
+      </p:nvGrpSpPr>
+      <p:grpSpPr>
+        <a:xfrm>
+          <a:off x="0" y="0"/>
+          <a:ext cx="0" cy="0"/>
+          <a:chOff x="0" y="0"/>
+          <a:chExt cx="0" cy="0"/>
+        </a:xfrm>
+      </p:grpSpPr>
+      <p:sp>
+        <p:nvSpPr>
+          <p:cNvPr id="2" name="Rectangle 1"/>
           <p:cNvSpPr/>
           <p:nvPr/>
         </p:nvSpPr>
         <p:spPr>
           <a:xfrm>
-            <a:off x="1371600" y="1828800"/>
-            <a:ext cx="9418320" cy="1417320"/>
-          </a:xfrm>
-          <a:prstGeom prst="roundRect">
+            <a:off x="0" y="0"/>
+            <a:ext cx="12191695" cy="749808"/>
+          </a:xfrm>
+          <a:prstGeom prst="rect">
             <a:avLst/>
           </a:prstGeom>
           <a:solidFill>
-            <a:srgbClr val="FFFFFF"/>
+            <a:srgbClr val="223D5C"/>
           </a:solidFill>
           <a:ln>
-            <a:solidFill>
-              <a:srgbClr val="377678"/>
-            </a:solidFill>
+            <a:noFill/>
           </a:ln>
         </p:spPr>
         <p:style>
@@ -5010,82 +5389,21 @@
           <a:bodyPr rtlCol="0" anchor="ctr"/>
           <a:lstStyle/>
           <a:p>
-            <a:pPr algn="ctr">
-              <a:defRPr sz="3000" b="1">
-                <a:solidFill>
-                  <a:srgbClr val="223D5C"/>
-                </a:solidFill>
-                <a:latin typeface="Cambria Math"/>
-              </a:defRPr>
-            </a:pPr>
-            <a:r>
-              <a:t>x̄ = (Σ mᵢ fᵢ) / n</a:t>
-            </a:r>
-          </a:p>
-          <a:p>
-            <a:pPr algn="ctr">
-              <a:defRPr sz="1700">
-                <a:solidFill>
-                  <a:srgbClr val="2D2D2D"/>
-                </a:solidFill>
-                <a:latin typeface="Microsoft JhengHei"/>
-              </a:defRPr>
-            </a:pPr>
-            <a:r>
-              <a:t>mᵢ：第 i 組組中點；fᵢ：第 i 組次數</a:t>
-            </a:r>
-          </a:p>
-        </p:txBody>
-      </p:sp>
-      <p:sp>
-        <p:nvSpPr>
-          <p:cNvPr id="5" name="TextBox 4"/>
+            <a:pPr algn="ctr"/>
+            <a:endParaRPr/>
+          </a:p>
+        </p:txBody>
+      </p:sp>
+      <p:sp>
+        <p:nvSpPr>
+          <p:cNvPr id="3" name="TextBox 2"/>
           <p:cNvSpPr txBox="1"/>
           <p:nvPr/>
         </p:nvSpPr>
         <p:spPr>
           <a:xfrm>
-            <a:off x="685800" y="3886200"/>
-            <a:ext cx="10789920" cy="4937760"/>
-          </a:xfrm>
-          <a:prstGeom prst="rect">
-            <a:avLst/>
-          </a:prstGeom>
-          <a:noFill/>
-        </p:spPr>
-        <p:txBody>
-          <a:bodyPr wrap="square">
-            <a:spAutoFit/>
-          </a:bodyPr>
-          <a:lstStyle/>
-          <a:p>
-            <a:pPr>
-              <a:spcAft>
-                <a:spcPts val="900"/>
-              </a:spcAft>
-              <a:defRPr sz="1800">
-                <a:solidFill>
-                  <a:srgbClr val="2D2D2D"/>
-                </a:solidFill>
-                <a:latin typeface="Microsoft JhengHei"/>
-              </a:defRPr>
-            </a:pPr>
-            <a:r>
-              <a:t>核心做法：組中點 × 次數 → 加總 → 除以總次數。</a:t>
-            </a:r>
-          </a:p>
-        </p:txBody>
-      </p:sp>
-      <p:sp>
-        <p:nvSpPr>
-          <p:cNvPr id="6" name="TextBox 5"/>
-          <p:cNvSpPr txBox="1"/>
-          <p:nvPr/>
-        </p:nvSpPr>
-        <p:spPr>
-          <a:xfrm>
-            <a:off x="10789920" y="6473952"/>
-            <a:ext cx="822960" cy="201168"/>
+            <a:off x="502920" y="128016"/>
+            <a:ext cx="10972800" cy="457200"/>
           </a:xfrm>
           <a:prstGeom prst="rect">
             <a:avLst/>
@@ -5098,57 +5416,41 @@
           </a:bodyPr>
           <a:lstStyle/>
           <a:p>
-            <a:pPr algn="r">
-              <a:defRPr sz="900">
-                <a:solidFill>
-                  <a:srgbClr val="6E6E6E"/>
-                </a:solidFill>
-                <a:latin typeface="Microsoft JhengHei"/>
-              </a:defRPr>
-            </a:pPr>
-            <a:r>
-              <a:t>W03 | 17</a:t>
-            </a:r>
-          </a:p>
-        </p:txBody>
-      </p:sp>
-    </p:spTree>
-  </p:cSld>
-  <p:clrMapOvr>
-    <a:masterClrMapping/>
-  </p:clrMapOvr>
-</p:sld>
-</file>
-
-<file path=ppt/slides/slide18.xml><?xml version="1.0" encoding="utf-8"?>
-<p:sld xmlns:a="http://schemas.openxmlformats.org/drawingml/2006/main" xmlns:p="http://schemas.openxmlformats.org/presentationml/2006/main" xmlns:r="http://schemas.openxmlformats.org/officeDocument/2006/relationships">
-  <p:cSld>
-    <p:spTree>
-      <p:nvGrpSpPr>
-        <p:cNvPr id="1" name=""/>
-        <p:cNvGrpSpPr/>
-        <p:nvPr/>
-      </p:nvGrpSpPr>
-      <p:grpSpPr/>
-      <p:sp>
-        <p:nvSpPr>
-          <p:cNvPr id="2" name="Rectangle 1"/>
+            <a:pPr>
+              <a:defRPr sz="2500" b="1">
+                <a:solidFill>
+                  <a:srgbClr val="FFFFFF"/>
+                </a:solidFill>
+                <a:latin typeface="Microsoft JhengHei"/>
+              </a:defRPr>
+            </a:pPr>
+            <a:r>
+              <a:t>分組資料平均數｜計算公式</a:t>
+            </a:r>
+          </a:p>
+        </p:txBody>
+      </p:sp>
+      <p:sp>
+        <p:nvSpPr>
+          <p:cNvPr id="4" name="Rounded Rectangle 3"/>
           <p:cNvSpPr/>
           <p:nvPr/>
         </p:nvSpPr>
         <p:spPr>
           <a:xfrm>
-            <a:off x="0" y="0"/>
-            <a:ext cx="12191695" cy="749808"/>
-          </a:xfrm>
-          <a:prstGeom prst="rect">
+            <a:off x="1371600" y="1828800"/>
+            <a:ext cx="9418320" cy="1417320"/>
+          </a:xfrm>
+          <a:prstGeom prst="roundRect">
             <a:avLst/>
           </a:prstGeom>
           <a:solidFill>
-            <a:srgbClr val="223D5C"/>
+            <a:srgbClr val="FFFFFF"/>
           </a:solidFill>
           <a:ln>
-            <a:noFill/>
+            <a:solidFill>
+              <a:srgbClr val="377678"/>
+            </a:solidFill>
           </a:ln>
         </p:spPr>
         <p:style>
@@ -5169,7 +5471,174 @@
           <a:bodyPr rtlCol="0" anchor="ctr"/>
           <a:lstStyle/>
           <a:p>
+            <a:pPr algn="ctr">
+              <a:defRPr sz="3000" b="1">
+                <a:solidFill>
+                  <a:srgbClr val="223D5C"/>
+                </a:solidFill>
+                <a:latin typeface="Cambria Math"/>
+              </a:defRPr>
+            </a:pPr>
+            <a:r>
+              <a:t>x̄ = (Σ mᵢ fᵢ) / n</a:t>
+            </a:r>
+          </a:p>
+          <a:p>
+            <a:pPr algn="ctr">
+              <a:defRPr sz="1700">
+                <a:solidFill>
+                  <a:srgbClr val="2D2D2D"/>
+                </a:solidFill>
+                <a:latin typeface="Microsoft JhengHei"/>
+              </a:defRPr>
+            </a:pPr>
+            <a:r>
+              <a:t>mᵢ：第 i 組組中點；fᵢ：第 i 組次數</a:t>
+            </a:r>
+          </a:p>
+        </p:txBody>
+      </p:sp>
+      <p:sp>
+        <p:nvSpPr>
+          <p:cNvPr id="5" name="TextBox 4"/>
+          <p:cNvSpPr txBox="1"/>
+          <p:nvPr/>
+        </p:nvSpPr>
+        <p:spPr>
+          <a:xfrm>
+            <a:off x="685800" y="3886200"/>
+            <a:ext cx="10789920" cy="4937760"/>
+          </a:xfrm>
+          <a:prstGeom prst="rect">
+            <a:avLst/>
+          </a:prstGeom>
+          <a:noFill/>
+        </p:spPr>
+        <p:txBody>
+          <a:bodyPr wrap="square">
+            <a:spAutoFit/>
+          </a:bodyPr>
+          <a:lstStyle/>
+          <a:p>
+            <a:pPr>
+              <a:spcAft>
+                <a:spcPts val="900"/>
+              </a:spcAft>
+              <a:defRPr sz="1800">
+                <a:solidFill>
+                  <a:srgbClr val="2D2D2D"/>
+                </a:solidFill>
+                <a:latin typeface="Microsoft JhengHei"/>
+              </a:defRPr>
+            </a:pPr>
+            <a:r>
+              <a:t>核心做法：組中點 × 次數 → 加總 → 除以總次數。</a:t>
+            </a:r>
+          </a:p>
+        </p:txBody>
+      </p:sp>
+      <p:sp>
+        <p:nvSpPr>
+          <p:cNvPr id="6" name="TextBox 5"/>
+          <p:cNvSpPr txBox="1"/>
+          <p:nvPr/>
+        </p:nvSpPr>
+        <p:spPr>
+          <a:xfrm>
+            <a:off x="10789920" y="6473952"/>
+            <a:ext cx="822960" cy="201168"/>
+          </a:xfrm>
+          <a:prstGeom prst="rect">
+            <a:avLst/>
+          </a:prstGeom>
+          <a:noFill/>
+        </p:spPr>
+        <p:txBody>
+          <a:bodyPr wrap="none">
+            <a:spAutoFit/>
+          </a:bodyPr>
+          <a:lstStyle/>
+          <a:p>
+            <a:pPr algn="r">
+              <a:defRPr sz="900">
+                <a:solidFill>
+                  <a:srgbClr val="6E6E6E"/>
+                </a:solidFill>
+                <a:latin typeface="Microsoft JhengHei"/>
+              </a:defRPr>
+            </a:pPr>
+            <a:r>
+              <a:t>W03 | 18</a:t>
+            </a:r>
+          </a:p>
+        </p:txBody>
+      </p:sp>
+    </p:spTree>
+  </p:cSld>
+  <p:clrMapOvr>
+    <a:masterClrMapping/>
+  </p:clrMapOvr>
+</p:sld>
+</file>
+
+<file path=ppt/slides/slide19.xml><?xml version="1.0" encoding="utf-8"?>
+<p:sld xmlns:a="http://schemas.openxmlformats.org/drawingml/2006/main" xmlns:r="http://schemas.openxmlformats.org/officeDocument/2006/relationships" xmlns:p="http://schemas.openxmlformats.org/presentationml/2006/main">
+  <p:cSld>
+    <p:spTree>
+      <p:nvGrpSpPr>
+        <p:cNvPr id="1" name=""/>
+        <p:cNvGrpSpPr/>
+        <p:nvPr/>
+      </p:nvGrpSpPr>
+      <p:grpSpPr>
+        <a:xfrm>
+          <a:off x="0" y="0"/>
+          <a:ext cx="0" cy="0"/>
+          <a:chOff x="0" y="0"/>
+          <a:chExt cx="0" cy="0"/>
+        </a:xfrm>
+      </p:grpSpPr>
+      <p:sp>
+        <p:nvSpPr>
+          <p:cNvPr id="2" name="Rectangle 1"/>
+          <p:cNvSpPr/>
+          <p:nvPr/>
+        </p:nvSpPr>
+        <p:spPr>
+          <a:xfrm>
+            <a:off x="0" y="0"/>
+            <a:ext cx="12191695" cy="749808"/>
+          </a:xfrm>
+          <a:prstGeom prst="rect">
+            <a:avLst/>
+          </a:prstGeom>
+          <a:solidFill>
+            <a:srgbClr val="223D5C"/>
+          </a:solidFill>
+          <a:ln>
+            <a:noFill/>
+          </a:ln>
+        </p:spPr>
+        <p:style>
+          <a:lnRef idx="1">
+            <a:schemeClr val="accent1"/>
+          </a:lnRef>
+          <a:fillRef idx="3">
+            <a:schemeClr val="accent1"/>
+          </a:fillRef>
+          <a:effectRef idx="2">
+            <a:schemeClr val="accent1"/>
+          </a:effectRef>
+          <a:fontRef idx="minor">
+            <a:schemeClr val="lt1"/>
+          </a:fontRef>
+        </p:style>
+        <p:txBody>
+          <a:bodyPr rtlCol="0" anchor="ctr"/>
+          <a:lstStyle/>
+          <a:p>
             <a:pPr algn="ctr"/>
+            <a:endParaRPr/>
           </a:p>
         </p:txBody>
       </p:sp>
@@ -5228,12 +5697,48 @@
                 <a:tableStyleId>{5C22544A-7EE6-4342-B048-85BDC9FD1C3A}</a:tableStyleId>
               </a:tblPr>
               <a:tblGrid>
-                <a:gridCol w="1828800"/>
-                <a:gridCol w="1828800"/>
-                <a:gridCol w="1828800"/>
-                <a:gridCol w="1828800"/>
-                <a:gridCol w="1828800"/>
-                <a:gridCol w="1828800"/>
+                <a:gridCol w="1828800">
+                  <a:extLst>
+                    <a:ext uri="{9D8B030D-6E8A-4147-A177-3AD203B41FA5}">
+                      <a16:colId xmlns:a16="http://schemas.microsoft.com/office/drawing/2014/main" val="20000"/>
+                    </a:ext>
+                  </a:extLst>
+                </a:gridCol>
+                <a:gridCol w="1828800">
+                  <a:extLst>
+                    <a:ext uri="{9D8B030D-6E8A-4147-A177-3AD203B41FA5}">
+                      <a16:colId xmlns:a16="http://schemas.microsoft.com/office/drawing/2014/main" val="20001"/>
+                    </a:ext>
+                  </a:extLst>
+                </a:gridCol>
+                <a:gridCol w="1828800">
+                  <a:extLst>
+                    <a:ext uri="{9D8B030D-6E8A-4147-A177-3AD203B41FA5}">
+                      <a16:colId xmlns:a16="http://schemas.microsoft.com/office/drawing/2014/main" val="20002"/>
+                    </a:ext>
+                  </a:extLst>
+                </a:gridCol>
+                <a:gridCol w="1828800">
+                  <a:extLst>
+                    <a:ext uri="{9D8B030D-6E8A-4147-A177-3AD203B41FA5}">
+                      <a16:colId xmlns:a16="http://schemas.microsoft.com/office/drawing/2014/main" val="20003"/>
+                    </a:ext>
+                  </a:extLst>
+                </a:gridCol>
+                <a:gridCol w="1828800">
+                  <a:extLst>
+                    <a:ext uri="{9D8B030D-6E8A-4147-A177-3AD203B41FA5}">
+                      <a16:colId xmlns:a16="http://schemas.microsoft.com/office/drawing/2014/main" val="20004"/>
+                    </a:ext>
+                  </a:extLst>
+                </a:gridCol>
+                <a:gridCol w="1828800">
+                  <a:extLst>
+                    <a:ext uri="{9D8B030D-6E8A-4147-A177-3AD203B41FA5}">
+                      <a16:colId xmlns:a16="http://schemas.microsoft.com/office/drawing/2014/main" val="20005"/>
+                    </a:ext>
+                  </a:extLst>
+                </a:gridCol>
               </a:tblGrid>
               <a:tr h="868680">
                 <a:tc>
@@ -5380,6 +5885,11 @@
                     </a:solidFill>
                   </a:tcPr>
                 </a:tc>
+                <a:extLst>
+                  <a:ext uri="{0D108BD9-81ED-4DB2-BD59-A6C34878D82A}">
+                    <a16:rowId xmlns:a16="http://schemas.microsoft.com/office/drawing/2014/main" val="10000"/>
+                  </a:ext>
+                </a:extLst>
               </a:tr>
               <a:tr h="868680">
                 <a:tc>
@@ -5526,6 +6036,11 @@
                     </a:solidFill>
                   </a:tcPr>
                 </a:tc>
+                <a:extLst>
+                  <a:ext uri="{0D108BD9-81ED-4DB2-BD59-A6C34878D82A}">
+                    <a16:rowId xmlns:a16="http://schemas.microsoft.com/office/drawing/2014/main" val="10001"/>
+                  </a:ext>
+                </a:extLst>
               </a:tr>
               <a:tr h="868680">
                 <a:tc>
@@ -5672,6 +6187,11 @@
                     </a:solidFill>
                   </a:tcPr>
                 </a:tc>
+                <a:extLst>
+                  <a:ext uri="{0D108BD9-81ED-4DB2-BD59-A6C34878D82A}">
+                    <a16:rowId xmlns:a16="http://schemas.microsoft.com/office/drawing/2014/main" val="10002"/>
+                  </a:ext>
+                </a:extLst>
               </a:tr>
               <a:tr h="868680">
                 <a:tc>
@@ -5818,6 +6338,11 @@
                     </a:solidFill>
                   </a:tcPr>
                 </a:tc>
+                <a:extLst>
+                  <a:ext uri="{0D108BD9-81ED-4DB2-BD59-A6C34878D82A}">
+                    <a16:rowId xmlns:a16="http://schemas.microsoft.com/office/drawing/2014/main" val="10003"/>
+                  </a:ext>
+                </a:extLst>
               </a:tr>
             </a:tbl>
           </a:graphicData>
@@ -5893,7 +6418,7 @@
               </a:defRPr>
             </a:pPr>
             <a:r>
-              <a:t>W03 | 18</a:t>
+              <a:t>W03 | 19</a:t>
             </a:r>
           </a:p>
         </p:txBody>
@@ -5906,8 +6431,8 @@
 </p:sld>
 </file>
 
-<file path=ppt/slides/slide19.xml><?xml version="1.0" encoding="utf-8"?>
-<p:sld xmlns:a="http://schemas.openxmlformats.org/drawingml/2006/main" xmlns:p="http://schemas.openxmlformats.org/presentationml/2006/main" xmlns:r="http://schemas.openxmlformats.org/officeDocument/2006/relationships">
+<file path=ppt/slides/slide2.xml><?xml version="1.0" encoding="utf-8"?>
+<p:sld xmlns:a="http://schemas.openxmlformats.org/drawingml/2006/main" xmlns:r="http://schemas.openxmlformats.org/officeDocument/2006/relationships" xmlns:p="http://schemas.openxmlformats.org/presentationml/2006/main">
   <p:cSld>
     <p:spTree>
       <p:nvGrpSpPr>
@@ -5915,7 +6440,14 @@
         <p:cNvGrpSpPr/>
         <p:nvPr/>
       </p:nvGrpSpPr>
-      <p:grpSpPr/>
+      <p:grpSpPr>
+        <a:xfrm>
+          <a:off x="0" y="0"/>
+          <a:ext cx="0" cy="0"/>
+          <a:chOff x="0" y="0"/>
+          <a:chExt cx="0" cy="0"/>
+        </a:xfrm>
+      </p:grpSpPr>
       <p:sp>
         <p:nvSpPr>
           <p:cNvPr id="2" name="Rectangle 1"/>
@@ -5956,6 +6488,7 @@
           <a:lstStyle/>
           <a:p>
             <a:pPr algn="ctr"/>
+            <a:endParaRPr/>
           </a:p>
         </p:txBody>
       </p:sp>
@@ -5990,98 +6523,220 @@
               </a:defRPr>
             </a:pPr>
             <a:r>
-              <a:t>例題 2｜一步一步算</a:t>
-            </a:r>
-          </a:p>
-        </p:txBody>
-      </p:sp>
-      <p:sp>
-        <p:nvSpPr>
-          <p:cNvPr id="4" name="TextBox 3"/>
-          <p:cNvSpPr txBox="1"/>
-          <p:nvPr/>
-        </p:nvSpPr>
-        <p:spPr>
-          <a:xfrm>
-            <a:off x="685800" y="1234440"/>
-            <a:ext cx="10789920" cy="4937760"/>
-          </a:xfrm>
-          <a:prstGeom prst="rect">
-            <a:avLst/>
-          </a:prstGeom>
-          <a:noFill/>
-        </p:spPr>
-        <p:txBody>
-          <a:bodyPr wrap="square">
-            <a:spAutoFit/>
-          </a:bodyPr>
-          <a:lstStyle/>
-          <a:p>
-            <a:pPr>
-              <a:spcAft>
-                <a:spcPts val="900"/>
-              </a:spcAft>
-              <a:defRPr sz="2000">
-                <a:solidFill>
-                  <a:srgbClr val="2D2D2D"/>
-                </a:solidFill>
-                <a:latin typeface="Microsoft JhengHei"/>
-              </a:defRPr>
-            </a:pPr>
-            <a:r>
-              <a:t>Σmf＝45×2＋55×4＋65×6＋75×5＋85×3</a:t>
-            </a:r>
-          </a:p>
-          <a:p>
-            <a:pPr>
-              <a:spcAft>
-                <a:spcPts val="900"/>
-              </a:spcAft>
-              <a:defRPr sz="2000">
-                <a:solidFill>
-                  <a:srgbClr val="2D2D2D"/>
-                </a:solidFill>
-                <a:latin typeface="Microsoft JhengHei"/>
-              </a:defRPr>
-            </a:pPr>
-            <a:r>
-              <a:t>＝90＋220＋390＋375＋255＝1,330</a:t>
-            </a:r>
-          </a:p>
-          <a:p>
-            <a:pPr>
-              <a:spcAft>
-                <a:spcPts val="900"/>
-              </a:spcAft>
-              <a:defRPr sz="2000">
-                <a:solidFill>
-                  <a:srgbClr val="2D2D2D"/>
-                </a:solidFill>
-                <a:latin typeface="Microsoft JhengHei"/>
-              </a:defRPr>
-            </a:pPr>
-            <a:r>
-              <a:t>n＝2＋4＋6＋5＋3＝20</a:t>
-            </a:r>
-          </a:p>
-          <a:p>
-            <a:pPr>
-              <a:spcAft>
-                <a:spcPts val="900"/>
-              </a:spcAft>
-              <a:defRPr sz="2000">
-                <a:solidFill>
-                  <a:srgbClr val="2D2D2D"/>
-                </a:solidFill>
-                <a:latin typeface="Microsoft JhengHei"/>
-              </a:defRPr>
-            </a:pPr>
-            <a:r>
-              <a:t>x̄＝1,330 ÷ 20＝66.5</a:t>
-            </a:r>
-          </a:p>
-        </p:txBody>
-      </p:sp>
+              <a:t>本週學習目標</a:t>
+            </a:r>
+          </a:p>
+        </p:txBody>
+      </p:sp>
+      <mc:AlternateContent xmlns:mc="http://schemas.openxmlformats.org/markup-compatibility/2006" xmlns:a14="http://schemas.microsoft.com/office/drawing/2010/main">
+        <mc:Choice Requires="a14">
+          <p:sp>
+            <p:nvSpPr>
+              <p:cNvPr id="4" name="TextBox 3"/>
+              <p:cNvSpPr txBox="1"/>
+              <p:nvPr/>
+            </p:nvSpPr>
+            <p:spPr>
+              <a:xfrm>
+                <a:off x="685800" y="1234440"/>
+                <a:ext cx="10789920" cy="2449645"/>
+              </a:xfrm>
+              <a:prstGeom prst="rect">
+                <a:avLst/>
+              </a:prstGeom>
+              <a:noFill/>
+            </p:spPr>
+            <p:txBody>
+              <a:bodyPr wrap="square">
+                <a:spAutoFit/>
+              </a:bodyPr>
+              <a:lstStyle/>
+              <a:p>
+                <a:pPr>
+                  <a:spcAft>
+                    <a:spcPts val="900"/>
+                  </a:spcAft>
+                  <a:defRPr sz="1900">
+                    <a:solidFill>
+                      <a:srgbClr val="2D2D2D"/>
+                    </a:solidFill>
+                    <a:latin typeface="Microsoft JhengHei"/>
+                  </a:defRPr>
+                </a:pPr>
+                <a:r>
+                  <a:rPr lang="zh-TW" altLang="en-US" dirty="0"/>
+                  <a:t>理解「集中趨勢量數」的用途</a:t>
+                </a:r>
+              </a:p>
+              <a:p>
+                <a:pPr>
+                  <a:spcAft>
+                    <a:spcPts val="900"/>
+                  </a:spcAft>
+                  <a:defRPr sz="1900">
+                    <a:solidFill>
+                      <a:srgbClr val="2D2D2D"/>
+                    </a:solidFill>
+                    <a:latin typeface="Microsoft JhengHei"/>
+                  </a:defRPr>
+                </a:pPr>
+                <a:r>
+                  <a:rPr lang="zh-TW" altLang="en-US" dirty="0"/>
+                  <a:t>知道常見集中趨勢量數有哪些</a:t>
+                </a:r>
+              </a:p>
+              <a:p>
+                <a:pPr>
+                  <a:spcAft>
+                    <a:spcPts val="900"/>
+                  </a:spcAft>
+                  <a:defRPr sz="1900">
+                    <a:solidFill>
+                      <a:srgbClr val="2D2D2D"/>
+                    </a:solidFill>
+                    <a:latin typeface="Microsoft JhengHei"/>
+                  </a:defRPr>
+                </a:pPr>
+                <a:r>
+                  <a:rPr lang="zh-TW" altLang="en-US" dirty="0"/>
+                  <a:t>區分母體平均數 </a:t>
+                </a:r>
+                <a14:m>
+                  <m:oMath xmlns:m="http://schemas.openxmlformats.org/officeDocument/2006/math">
+                    <m:r>
+                      <a:rPr lang="zh-TW" altLang="en-US" i="1" dirty="0" smtClean="0">
+                        <a:latin typeface="Cambria Math" panose="02040503050406030204" pitchFamily="18" charset="0"/>
+                      </a:rPr>
+                      <m:t>𝜇</m:t>
+                    </m:r>
+                  </m:oMath>
+                </a14:m>
+                <a:r>
+                  <a:rPr lang="en-US" altLang="zh-TW" dirty="0"/>
+                  <a:t> </a:t>
+                </a:r>
+                <a:r>
+                  <a:rPr lang="zh-TW" altLang="en-US" dirty="0"/>
+                  <a:t>與樣本平均數</a:t>
+                </a:r>
+                <a14:m>
+                  <m:oMath xmlns:m="http://schemas.openxmlformats.org/officeDocument/2006/math">
+                    <m:acc>
+                      <m:accPr>
+                        <m:chr m:val="̅"/>
+                        <m:ctrlPr>
+                          <a:rPr lang="en-US" altLang="zh-TW" b="0" i="1" smtClean="0">
+                            <a:latin typeface="Cambria Math" panose="02040503050406030204" pitchFamily="18" charset="0"/>
+                          </a:rPr>
+                        </m:ctrlPr>
+                      </m:accPr>
+                      <m:e>
+                        <m:r>
+                          <a:rPr lang="en-US" altLang="zh-TW" b="0" i="1" smtClean="0">
+                            <a:latin typeface="Cambria Math" panose="02040503050406030204" pitchFamily="18" charset="0"/>
+                          </a:rPr>
+                          <m:t>𝑥</m:t>
+                        </m:r>
+                      </m:e>
+                    </m:acc>
+                  </m:oMath>
+                </a14:m>
+                <a:endParaRPr lang="en-US" altLang="zh-TW" dirty="0"/>
+              </a:p>
+              <a:p>
+                <a:pPr>
+                  <a:spcAft>
+                    <a:spcPts val="900"/>
+                  </a:spcAft>
+                  <a:defRPr sz="1900">
+                    <a:solidFill>
+                      <a:srgbClr val="2D2D2D"/>
+                    </a:solidFill>
+                    <a:latin typeface="Microsoft JhengHei"/>
+                  </a:defRPr>
+                </a:pPr>
+                <a:r>
+                  <a:rPr lang="zh-TW" altLang="en-US" dirty="0"/>
+                  <a:t>計算原始資料的算術平均數</a:t>
+                </a:r>
+              </a:p>
+              <a:p>
+                <a:pPr>
+                  <a:spcAft>
+                    <a:spcPts val="900"/>
+                  </a:spcAft>
+                  <a:defRPr sz="1900">
+                    <a:solidFill>
+                      <a:srgbClr val="2D2D2D"/>
+                    </a:solidFill>
+                    <a:latin typeface="Microsoft JhengHei"/>
+                  </a:defRPr>
+                </a:pPr>
+                <a:r>
+                  <a:rPr lang="zh-TW" altLang="en-US" dirty="0"/>
+                  <a:t>利用次數分配表計算分組資料的平均數</a:t>
+                </a:r>
+              </a:p>
+              <a:p>
+                <a:pPr>
+                  <a:spcAft>
+                    <a:spcPts val="900"/>
+                  </a:spcAft>
+                  <a:defRPr sz="1900">
+                    <a:solidFill>
+                      <a:srgbClr val="2D2D2D"/>
+                    </a:solidFill>
+                    <a:latin typeface="Microsoft JhengHei"/>
+                  </a:defRPr>
+                </a:pPr>
+                <a:r>
+                  <a:rPr lang="zh-TW" altLang="en-US" dirty="0"/>
+                  <a:t>說明平均數的優點與使用限制</a:t>
+                </a:r>
+                <a:endParaRPr dirty="0"/>
+              </a:p>
+            </p:txBody>
+          </p:sp>
+        </mc:Choice>
+        <mc:Fallback xmlns="">
+          <p:sp>
+            <p:nvSpPr>
+              <p:cNvPr id="4" name="TextBox 3"/>
+              <p:cNvSpPr txBox="1">
+                <a:spLocks noRot="1" noChangeAspect="1" noMove="1" noResize="1" noEditPoints="1" noAdjustHandles="1" noChangeArrowheads="1" noChangeShapeType="1" noTextEdit="1"/>
+              </p:cNvSpPr>
+              <p:nvPr/>
+            </p:nvSpPr>
+            <p:spPr>
+              <a:xfrm>
+                <a:off x="685800" y="1234440"/>
+                <a:ext cx="10789920" cy="2449645"/>
+              </a:xfrm>
+              <a:prstGeom prst="rect">
+                <a:avLst/>
+              </a:prstGeom>
+              <a:blipFill>
+                <a:blip r:embed="rId2"/>
+                <a:stretch>
+                  <a:fillRect l="-565" t="-1247" b="-2244"/>
+                </a:stretch>
+              </a:blipFill>
+            </p:spPr>
+            <p:txBody>
+              <a:bodyPr/>
+              <a:lstStyle/>
+              <a:p>
+                <a:r>
+                  <a:rPr lang="zh-TW" altLang="en-US">
+                    <a:noFill/>
+                  </a:rPr>
+                  <a:t> </a:t>
+                </a:r>
+              </a:p>
+            </p:txBody>
+          </p:sp>
+        </mc:Fallback>
+      </mc:AlternateContent>
       <p:sp>
         <p:nvSpPr>
           <p:cNvPr id="5" name="TextBox 4"/>
@@ -6113,7 +6768,7 @@
               </a:defRPr>
             </a:pPr>
             <a:r>
-              <a:t>W03 | 19</a:t>
+              <a:t>W03 | 2</a:t>
             </a:r>
           </a:p>
         </p:txBody>
@@ -6126,8 +6781,8 @@
 </p:sld>
 </file>
 
-<file path=ppt/slides/slide2.xml><?xml version="1.0" encoding="utf-8"?>
-<p:sld xmlns:a="http://schemas.openxmlformats.org/drawingml/2006/main" xmlns:p="http://schemas.openxmlformats.org/presentationml/2006/main" xmlns:r="http://schemas.openxmlformats.org/officeDocument/2006/relationships">
+<file path=ppt/slides/slide20.xml><?xml version="1.0" encoding="utf-8"?>
+<p:sld xmlns:a="http://schemas.openxmlformats.org/drawingml/2006/main" xmlns:r="http://schemas.openxmlformats.org/officeDocument/2006/relationships" xmlns:p="http://schemas.openxmlformats.org/presentationml/2006/main">
   <p:cSld>
     <p:spTree>
       <p:nvGrpSpPr>
@@ -6135,7 +6790,14 @@
         <p:cNvGrpSpPr/>
         <p:nvPr/>
       </p:nvGrpSpPr>
-      <p:grpSpPr/>
+      <p:grpSpPr>
+        <a:xfrm>
+          <a:off x="0" y="0"/>
+          <a:ext cx="0" cy="0"/>
+          <a:chOff x="0" y="0"/>
+          <a:chExt cx="0" cy="0"/>
+        </a:xfrm>
+      </p:grpSpPr>
       <p:sp>
         <p:nvSpPr>
           <p:cNvPr id="2" name="Rectangle 1"/>
@@ -6176,6 +6838,7 @@
           <a:lstStyle/>
           <a:p>
             <a:pPr algn="ctr"/>
+            <a:endParaRPr/>
           </a:p>
         </p:txBody>
       </p:sp>
@@ -6210,7 +6873,7 @@
               </a:defRPr>
             </a:pPr>
             <a:r>
-              <a:t>本週學習目標</a:t>
+              <a:t>例題 2｜一步一步算</a:t>
             </a:r>
           </a:p>
         </p:txBody>
@@ -6241,7 +6904,7 @@
               <a:spcAft>
                 <a:spcPts val="900"/>
               </a:spcAft>
-              <a:defRPr sz="1900">
+              <a:defRPr sz="2000">
                 <a:solidFill>
                   <a:srgbClr val="2D2D2D"/>
                 </a:solidFill>
@@ -6249,7 +6912,7 @@
               </a:defRPr>
             </a:pPr>
             <a:r>
-              <a:t>理解「集中趨勢量數」的用途</a:t>
+              <a:t>Σmf＝45×2＋55×4＋65×6＋75×5＋85×3</a:t>
             </a:r>
           </a:p>
           <a:p>
@@ -6257,7 +6920,7 @@
               <a:spcAft>
                 <a:spcPts val="900"/>
               </a:spcAft>
-              <a:defRPr sz="1900">
+              <a:defRPr sz="2000">
                 <a:solidFill>
                   <a:srgbClr val="2D2D2D"/>
                 </a:solidFill>
@@ -6265,7 +6928,7 @@
               </a:defRPr>
             </a:pPr>
             <a:r>
-              <a:t>知道常見集中趨勢量數有哪些</a:t>
+              <a:t>＝90＋220＋390＋375＋255＝1,330</a:t>
             </a:r>
           </a:p>
           <a:p>
@@ -6273,7 +6936,7 @@
               <a:spcAft>
                 <a:spcPts val="900"/>
               </a:spcAft>
-              <a:defRPr sz="1900">
+              <a:defRPr sz="2000">
                 <a:solidFill>
                   <a:srgbClr val="2D2D2D"/>
                 </a:solidFill>
@@ -6281,7 +6944,7 @@
               </a:defRPr>
             </a:pPr>
             <a:r>
-              <a:t>區分母體平均數 μ 與樣本平均數 x̄</a:t>
+              <a:t>n＝2＋4＋6＋5＋3＝20</a:t>
             </a:r>
           </a:p>
           <a:p>
@@ -6289,7 +6952,7 @@
               <a:spcAft>
                 <a:spcPts val="900"/>
               </a:spcAft>
-              <a:defRPr sz="1900">
+              <a:defRPr sz="2000">
                 <a:solidFill>
                   <a:srgbClr val="2D2D2D"/>
                 </a:solidFill>
@@ -6297,39 +6960,7 @@
               </a:defRPr>
             </a:pPr>
             <a:r>
-              <a:t>計算原始資料的算術平均數</a:t>
-            </a:r>
-          </a:p>
-          <a:p>
-            <a:pPr>
-              <a:spcAft>
-                <a:spcPts val="900"/>
-              </a:spcAft>
-              <a:defRPr sz="1900">
-                <a:solidFill>
-                  <a:srgbClr val="2D2D2D"/>
-                </a:solidFill>
-                <a:latin typeface="Microsoft JhengHei"/>
-              </a:defRPr>
-            </a:pPr>
-            <a:r>
-              <a:t>利用次數分配表計算分組資料的平均數</a:t>
-            </a:r>
-          </a:p>
-          <a:p>
-            <a:pPr>
-              <a:spcAft>
-                <a:spcPts val="900"/>
-              </a:spcAft>
-              <a:defRPr sz="1900">
-                <a:solidFill>
-                  <a:srgbClr val="2D2D2D"/>
-                </a:solidFill>
-                <a:latin typeface="Microsoft JhengHei"/>
-              </a:defRPr>
-            </a:pPr>
-            <a:r>
-              <a:t>說明平均數的優點與使用限制</a:t>
+              <a:t>x̄＝1,330 ÷ 20＝66.5</a:t>
             </a:r>
           </a:p>
         </p:txBody>
@@ -6365,7 +6996,7 @@
               </a:defRPr>
             </a:pPr>
             <a:r>
-              <a:t>W03 | 2</a:t>
+              <a:t>W03 | 20</a:t>
             </a:r>
           </a:p>
         </p:txBody>
@@ -6378,8 +7009,8 @@
 </p:sld>
 </file>
 
-<file path=ppt/slides/slide20.xml><?xml version="1.0" encoding="utf-8"?>
-<p:sld xmlns:a="http://schemas.openxmlformats.org/drawingml/2006/main" xmlns:p="http://schemas.openxmlformats.org/presentationml/2006/main" xmlns:r="http://schemas.openxmlformats.org/officeDocument/2006/relationships">
+<file path=ppt/slides/slide21.xml><?xml version="1.0" encoding="utf-8"?>
+<p:sld xmlns:a="http://schemas.openxmlformats.org/drawingml/2006/main" xmlns:r="http://schemas.openxmlformats.org/officeDocument/2006/relationships" xmlns:p="http://schemas.openxmlformats.org/presentationml/2006/main">
   <p:cSld>
     <p:spTree>
       <p:nvGrpSpPr>
@@ -6387,7 +7018,14 @@
         <p:cNvGrpSpPr/>
         <p:nvPr/>
       </p:nvGrpSpPr>
-      <p:grpSpPr/>
+      <p:grpSpPr>
+        <a:xfrm>
+          <a:off x="0" y="0"/>
+          <a:ext cx="0" cy="0"/>
+          <a:chOff x="0" y="0"/>
+          <a:chExt cx="0" cy="0"/>
+        </a:xfrm>
+      </p:grpSpPr>
       <p:sp>
         <p:nvSpPr>
           <p:cNvPr id="2" name="Rectangle 1"/>
@@ -6428,6 +7066,7 @@
           <a:lstStyle/>
           <a:p>
             <a:pPr algn="ctr"/>
+            <a:endParaRPr/>
           </a:p>
         </p:txBody>
       </p:sp>
@@ -6489,51 +7128,13 @@
           </a:bodyPr>
           <a:lstStyle/>
           <a:p>
-            <a:pPr>
-              <a:spcAft>
-                <a:spcPts val="900"/>
-              </a:spcAft>
-              <a:defRPr sz="2000">
-                <a:solidFill>
-                  <a:srgbClr val="2D2D2D"/>
-                </a:solidFill>
-                <a:latin typeface="Microsoft JhengHei"/>
-              </a:defRPr>
-            </a:pPr>
-            <a:r>
-              <a:t>因為我們用「組中點」代表該組內的所有資料。</a:t>
-            </a:r>
-          </a:p>
-          <a:p>
-            <a:pPr>
-              <a:spcAft>
-                <a:spcPts val="900"/>
-              </a:spcAft>
-              <a:defRPr sz="2000">
-                <a:solidFill>
-                  <a:srgbClr val="2D2D2D"/>
-                </a:solidFill>
-                <a:latin typeface="Microsoft JhengHei"/>
-              </a:defRPr>
-            </a:pPr>
-            <a:r>
-              <a:t>實際資料不一定真的全部等於組中點。</a:t>
-            </a:r>
-          </a:p>
-          <a:p>
-            <a:pPr>
-              <a:spcAft>
-                <a:spcPts val="900"/>
-              </a:spcAft>
-              <a:defRPr sz="2000">
-                <a:solidFill>
-                  <a:srgbClr val="2D2D2D"/>
-                </a:solidFill>
-                <a:latin typeface="Microsoft JhengHei"/>
-              </a:defRPr>
-            </a:pPr>
-            <a:r>
-              <a:t>所以從分組次數表算出的平均數，通常只是很接近原始資料的平均數。</a:t>
+            <a:r>
+              <a:t>因為不知道各組內每一筆資料的實際數值，只能以「組中點」作為該組資料的代表值。</a:t>
+            </a:r>
+          </a:p>
+          <a:p>
+            <a:r>
+              <a:t>因此從分組次數表算出的平均數，通常是原始資料平均數的估計值。</a:t>
             </a:r>
           </a:p>
         </p:txBody>
@@ -6569,7 +7170,7 @@
               </a:defRPr>
             </a:pPr>
             <a:r>
-              <a:t>W03 | 20</a:t>
+              <a:t>W03 | 21</a:t>
             </a:r>
           </a:p>
         </p:txBody>
@@ -6582,8 +7183,8 @@
 </p:sld>
 </file>
 
-<file path=ppt/slides/slide21.xml><?xml version="1.0" encoding="utf-8"?>
-<p:sld xmlns:a="http://schemas.openxmlformats.org/drawingml/2006/main" xmlns:p="http://schemas.openxmlformats.org/presentationml/2006/main" xmlns:r="http://schemas.openxmlformats.org/officeDocument/2006/relationships">
+<file path=ppt/slides/slide22.xml><?xml version="1.0" encoding="utf-8"?>
+<p:sld xmlns:a="http://schemas.openxmlformats.org/drawingml/2006/main" xmlns:r="http://schemas.openxmlformats.org/officeDocument/2006/relationships" xmlns:p="http://schemas.openxmlformats.org/presentationml/2006/main">
   <p:cSld>
     <p:spTree>
       <p:nvGrpSpPr>
@@ -6591,7 +7192,14 @@
         <p:cNvGrpSpPr/>
         <p:nvPr/>
       </p:nvGrpSpPr>
-      <p:grpSpPr/>
+      <p:grpSpPr>
+        <a:xfrm>
+          <a:off x="0" y="0"/>
+          <a:ext cx="0" cy="0"/>
+          <a:chOff x="0" y="0"/>
+          <a:chExt cx="0" cy="0"/>
+        </a:xfrm>
+      </p:grpSpPr>
       <p:sp>
         <p:nvSpPr>
           <p:cNvPr id="2" name="Rectangle 1"/>
@@ -6632,6 +7240,7 @@
           <a:lstStyle/>
           <a:p>
             <a:pPr algn="ctr"/>
+            <a:endParaRPr/>
           </a:p>
         </p:txBody>
       </p:sp>
@@ -6789,7 +7398,7 @@
               </a:defRPr>
             </a:pPr>
             <a:r>
-              <a:t>W03 | 21</a:t>
+              <a:t>W03 | 22</a:t>
             </a:r>
           </a:p>
         </p:txBody>
@@ -6802,8 +7411,8 @@
 </p:sld>
 </file>
 
-<file path=ppt/slides/slide22.xml><?xml version="1.0" encoding="utf-8"?>
-<p:sld xmlns:a="http://schemas.openxmlformats.org/drawingml/2006/main" xmlns:p="http://schemas.openxmlformats.org/presentationml/2006/main" xmlns:r="http://schemas.openxmlformats.org/officeDocument/2006/relationships">
+<file path=ppt/slides/slide23.xml><?xml version="1.0" encoding="utf-8"?>
+<p:sld xmlns:a="http://schemas.openxmlformats.org/drawingml/2006/main" xmlns:r="http://schemas.openxmlformats.org/officeDocument/2006/relationships" xmlns:p="http://schemas.openxmlformats.org/presentationml/2006/main">
   <p:cSld>
     <p:spTree>
       <p:nvGrpSpPr>
@@ -6811,7 +7420,14 @@
         <p:cNvGrpSpPr/>
         <p:nvPr/>
       </p:nvGrpSpPr>
-      <p:grpSpPr/>
+      <p:grpSpPr>
+        <a:xfrm>
+          <a:off x="0" y="0"/>
+          <a:ext cx="0" cy="0"/>
+          <a:chOff x="0" y="0"/>
+          <a:chExt cx="0" cy="0"/>
+        </a:xfrm>
+      </p:grpSpPr>
       <p:sp>
         <p:nvSpPr>
           <p:cNvPr id="2" name="Rectangle 1"/>
@@ -6852,6 +7468,7 @@
           <a:lstStyle/>
           <a:p>
             <a:pPr algn="ctr"/>
+            <a:endParaRPr/>
           </a:p>
         </p:txBody>
       </p:sp>
@@ -6925,7 +7542,7 @@
               </a:defRPr>
             </a:pPr>
             <a:r>
-              <a:t>舊教材特別提醒：極端值會對算術平均數產生很大影響。</a:t>
+              <a:t>特別要注意：極端值會對算術平均數產生很大影響。</a:t>
             </a:r>
           </a:p>
           <a:p>
@@ -7009,7 +7626,7 @@
               </a:defRPr>
             </a:pPr>
             <a:r>
-              <a:t>W03 | 22</a:t>
+              <a:t>W03 | 23</a:t>
             </a:r>
           </a:p>
         </p:txBody>
@@ -7022,8 +7639,8 @@
 </p:sld>
 </file>
 
-<file path=ppt/slides/slide23.xml><?xml version="1.0" encoding="utf-8"?>
-<p:sld xmlns:a="http://schemas.openxmlformats.org/drawingml/2006/main" xmlns:p="http://schemas.openxmlformats.org/presentationml/2006/main" xmlns:r="http://schemas.openxmlformats.org/officeDocument/2006/relationships">
+<file path=ppt/slides/slide24.xml><?xml version="1.0" encoding="utf-8"?>
+<p:sld xmlns:a="http://schemas.openxmlformats.org/drawingml/2006/main" xmlns:r="http://schemas.openxmlformats.org/officeDocument/2006/relationships" xmlns:p="http://schemas.openxmlformats.org/presentationml/2006/main">
   <p:cSld>
     <p:spTree>
       <p:nvGrpSpPr>
@@ -7031,7 +7648,14 @@
         <p:cNvGrpSpPr/>
         <p:nvPr/>
       </p:nvGrpSpPr>
-      <p:grpSpPr/>
+      <p:grpSpPr>
+        <a:xfrm>
+          <a:off x="0" y="0"/>
+          <a:ext cx="0" cy="0"/>
+          <a:chOff x="0" y="0"/>
+          <a:chExt cx="0" cy="0"/>
+        </a:xfrm>
+      </p:grpSpPr>
       <p:sp>
         <p:nvSpPr>
           <p:cNvPr id="2" name="Rectangle 1"/>
@@ -7072,6 +7696,7 @@
           <a:lstStyle/>
           <a:p>
             <a:pPr algn="ctr"/>
+            <a:endParaRPr/>
           </a:p>
         </p:txBody>
       </p:sp>
@@ -7130,13 +7755,55 @@
                 <a:tableStyleId>{5C22544A-7EE6-4342-B048-85BDC9FD1C3A}</a:tableStyleId>
               </a:tblPr>
               <a:tblGrid>
-                <a:gridCol w="1528354"/>
-                <a:gridCol w="1528354"/>
-                <a:gridCol w="1528354"/>
-                <a:gridCol w="1528354"/>
-                <a:gridCol w="1528354"/>
-                <a:gridCol w="1528354"/>
-                <a:gridCol w="1528356"/>
+                <a:gridCol w="1528354">
+                  <a:extLst>
+                    <a:ext uri="{9D8B030D-6E8A-4147-A177-3AD203B41FA5}">
+                      <a16:colId xmlns:a16="http://schemas.microsoft.com/office/drawing/2014/main" val="20000"/>
+                    </a:ext>
+                  </a:extLst>
+                </a:gridCol>
+                <a:gridCol w="1528354">
+                  <a:extLst>
+                    <a:ext uri="{9D8B030D-6E8A-4147-A177-3AD203B41FA5}">
+                      <a16:colId xmlns:a16="http://schemas.microsoft.com/office/drawing/2014/main" val="20001"/>
+                    </a:ext>
+                  </a:extLst>
+                </a:gridCol>
+                <a:gridCol w="1528354">
+                  <a:extLst>
+                    <a:ext uri="{9D8B030D-6E8A-4147-A177-3AD203B41FA5}">
+                      <a16:colId xmlns:a16="http://schemas.microsoft.com/office/drawing/2014/main" val="20002"/>
+                    </a:ext>
+                  </a:extLst>
+                </a:gridCol>
+                <a:gridCol w="1528354">
+                  <a:extLst>
+                    <a:ext uri="{9D8B030D-6E8A-4147-A177-3AD203B41FA5}">
+                      <a16:colId xmlns:a16="http://schemas.microsoft.com/office/drawing/2014/main" val="20003"/>
+                    </a:ext>
+                  </a:extLst>
+                </a:gridCol>
+                <a:gridCol w="1528354">
+                  <a:extLst>
+                    <a:ext uri="{9D8B030D-6E8A-4147-A177-3AD203B41FA5}">
+                      <a16:colId xmlns:a16="http://schemas.microsoft.com/office/drawing/2014/main" val="20004"/>
+                    </a:ext>
+                  </a:extLst>
+                </a:gridCol>
+                <a:gridCol w="1528354">
+                  <a:extLst>
+                    <a:ext uri="{9D8B030D-6E8A-4147-A177-3AD203B41FA5}">
+                      <a16:colId xmlns:a16="http://schemas.microsoft.com/office/drawing/2014/main" val="20005"/>
+                    </a:ext>
+                  </a:extLst>
+                </a:gridCol>
+                <a:gridCol w="1528356">
+                  <a:extLst>
+                    <a:ext uri="{9D8B030D-6E8A-4147-A177-3AD203B41FA5}">
+                      <a16:colId xmlns:a16="http://schemas.microsoft.com/office/drawing/2014/main" val="20006"/>
+                    </a:ext>
+                  </a:extLst>
+                </a:gridCol>
               </a:tblGrid>
               <a:tr h="944880">
                 <a:tc>
@@ -7307,6 +7974,11 @@
                     </a:solidFill>
                   </a:tcPr>
                 </a:tc>
+                <a:extLst>
+                  <a:ext uri="{0D108BD9-81ED-4DB2-BD59-A6C34878D82A}">
+                    <a16:rowId xmlns:a16="http://schemas.microsoft.com/office/drawing/2014/main" val="10000"/>
+                  </a:ext>
+                </a:extLst>
               </a:tr>
               <a:tr h="944880">
                 <a:tc>
@@ -7477,6 +8149,11 @@
                     </a:solidFill>
                   </a:tcPr>
                 </a:tc>
+                <a:extLst>
+                  <a:ext uri="{0D108BD9-81ED-4DB2-BD59-A6C34878D82A}">
+                    <a16:rowId xmlns:a16="http://schemas.microsoft.com/office/drawing/2014/main" val="10001"/>
+                  </a:ext>
+                </a:extLst>
               </a:tr>
               <a:tr h="944880">
                 <a:tc>
@@ -7647,6 +8324,11 @@
                     </a:solidFill>
                   </a:tcPr>
                 </a:tc>
+                <a:extLst>
+                  <a:ext uri="{0D108BD9-81ED-4DB2-BD59-A6C34878D82A}">
+                    <a16:rowId xmlns:a16="http://schemas.microsoft.com/office/drawing/2014/main" val="10002"/>
+                  </a:ext>
+                </a:extLst>
               </a:tr>
             </a:tbl>
           </a:graphicData>
@@ -7722,7 +8404,7 @@
               </a:defRPr>
             </a:pPr>
             <a:r>
-              <a:t>W03 | 23</a:t>
+              <a:t>W03 | 24</a:t>
             </a:r>
           </a:p>
         </p:txBody>
@@ -7735,8 +8417,8 @@
 </p:sld>
 </file>
 
-<file path=ppt/slides/slide24.xml><?xml version="1.0" encoding="utf-8"?>
-<p:sld xmlns:a="http://schemas.openxmlformats.org/drawingml/2006/main" xmlns:p="http://schemas.openxmlformats.org/presentationml/2006/main" xmlns:r="http://schemas.openxmlformats.org/officeDocument/2006/relationships">
+<file path=ppt/slides/slide25.xml><?xml version="1.0" encoding="utf-8"?>
+<p:sld xmlns:a="http://schemas.openxmlformats.org/drawingml/2006/main" xmlns:r="http://schemas.openxmlformats.org/officeDocument/2006/relationships" xmlns:p="http://schemas.openxmlformats.org/presentationml/2006/main">
   <p:cSld>
     <p:spTree>
       <p:nvGrpSpPr>
@@ -7744,7 +8426,14 @@
         <p:cNvGrpSpPr/>
         <p:nvPr/>
       </p:nvGrpSpPr>
-      <p:grpSpPr/>
+      <p:grpSpPr>
+        <a:xfrm>
+          <a:off x="0" y="0"/>
+          <a:ext cx="0" cy="0"/>
+          <a:chOff x="0" y="0"/>
+          <a:chExt cx="0" cy="0"/>
+        </a:xfrm>
+      </p:grpSpPr>
       <p:sp>
         <p:nvSpPr>
           <p:cNvPr id="2" name="Rectangle 1"/>
@@ -7785,6 +8474,7 @@
           <a:lstStyle/>
           <a:p>
             <a:pPr algn="ctr"/>
+            <a:endParaRPr/>
           </a:p>
         </p:txBody>
       </p:sp>
@@ -7890,7 +8580,7 @@
               </a:defRPr>
             </a:pPr>
             <a:r>
-              <a:t>這也是舊教材列出的平均數使用限制之一。</a:t>
+              <a:t>這也是使用分組資料計算平均數時的重要限制。</a:t>
             </a:r>
           </a:p>
         </p:txBody>
@@ -7926,7 +8616,7 @@
               </a:defRPr>
             </a:pPr>
             <a:r>
-              <a:t>W03 | 24</a:t>
+              <a:t>W03 | 25</a:t>
             </a:r>
           </a:p>
         </p:txBody>
@@ -7939,8 +8629,8 @@
 </p:sld>
 </file>
 
-<file path=ppt/slides/slide25.xml><?xml version="1.0" encoding="utf-8"?>
-<p:sld xmlns:a="http://schemas.openxmlformats.org/drawingml/2006/main" xmlns:p="http://schemas.openxmlformats.org/presentationml/2006/main" xmlns:r="http://schemas.openxmlformats.org/officeDocument/2006/relationships">
+<file path=ppt/slides/slide26.xml><?xml version="1.0" encoding="utf-8"?>
+<p:sld xmlns:a="http://schemas.openxmlformats.org/drawingml/2006/main" xmlns:r="http://schemas.openxmlformats.org/officeDocument/2006/relationships" xmlns:p="http://schemas.openxmlformats.org/presentationml/2006/main">
   <p:cSld>
     <p:spTree>
       <p:nvGrpSpPr>
@@ -7948,7 +8638,14 @@
         <p:cNvGrpSpPr/>
         <p:nvPr/>
       </p:nvGrpSpPr>
-      <p:grpSpPr/>
+      <p:grpSpPr>
+        <a:xfrm>
+          <a:off x="0" y="0"/>
+          <a:ext cx="0" cy="0"/>
+          <a:chOff x="0" y="0"/>
+          <a:chExt cx="0" cy="0"/>
+        </a:xfrm>
+      </p:grpSpPr>
       <p:sp>
         <p:nvSpPr>
           <p:cNvPr id="2" name="Rectangle 1"/>
@@ -7989,6 +8686,7 @@
           <a:lstStyle/>
           <a:p>
             <a:pPr algn="ctr"/>
+            <a:endParaRPr/>
           </a:p>
         </p:txBody>
       </p:sp>
@@ -8146,7 +8844,7 @@
               </a:defRPr>
             </a:pPr>
             <a:r>
-              <a:t>W03 | 25</a:t>
+              <a:t>W03 | 26</a:t>
             </a:r>
           </a:p>
         </p:txBody>
@@ -8159,8 +8857,8 @@
 </p:sld>
 </file>
 
-<file path=ppt/slides/slide26.xml><?xml version="1.0" encoding="utf-8"?>
-<p:sld xmlns:a="http://schemas.openxmlformats.org/drawingml/2006/main" xmlns:p="http://schemas.openxmlformats.org/presentationml/2006/main" xmlns:r="http://schemas.openxmlformats.org/officeDocument/2006/relationships">
+<file path=ppt/slides/slide27.xml><?xml version="1.0" encoding="utf-8"?>
+<p:sld xmlns:a="http://schemas.openxmlformats.org/drawingml/2006/main" xmlns:r="http://schemas.openxmlformats.org/officeDocument/2006/relationships" xmlns:p="http://schemas.openxmlformats.org/presentationml/2006/main">
   <p:cSld>
     <p:spTree>
       <p:nvGrpSpPr>
@@ -8168,7 +8866,14 @@
         <p:cNvGrpSpPr/>
         <p:nvPr/>
       </p:nvGrpSpPr>
-      <p:grpSpPr/>
+      <p:grpSpPr>
+        <a:xfrm>
+          <a:off x="0" y="0"/>
+          <a:ext cx="0" cy="0"/>
+          <a:chOff x="0" y="0"/>
+          <a:chExt cx="0" cy="0"/>
+        </a:xfrm>
+      </p:grpSpPr>
       <p:sp>
         <p:nvSpPr>
           <p:cNvPr id="2" name="Rectangle 1"/>
@@ -8209,6 +8914,7 @@
           <a:lstStyle/>
           <a:p>
             <a:pPr algn="ctr"/>
+            <a:endParaRPr/>
           </a:p>
         </p:txBody>
       </p:sp>
@@ -8257,7 +8963,7 @@
         <p:spPr>
           <a:xfrm>
             <a:off x="685800" y="1234440"/>
-            <a:ext cx="10789920" cy="4937760"/>
+            <a:ext cx="10789920" cy="1273747"/>
           </a:xfrm>
           <a:prstGeom prst="rect">
             <a:avLst/>
@@ -8282,6 +8988,10 @@
               </a:defRPr>
             </a:pPr>
             <a:r>
+              <a:rPr lang="zh-TW" altLang="en-US" dirty="0">
+                <a:latin typeface="微軟正黑體" panose="020B0604030504040204" pitchFamily="34" charset="-120"/>
+                <a:ea typeface="微軟正黑體" panose="020B0604030504040204" pitchFamily="34" charset="-120"/>
+              </a:rPr>
               <a:t>會算：原始資料與分組資料平均數。</a:t>
             </a:r>
           </a:p>
@@ -8298,7 +9008,11 @@
               </a:defRPr>
             </a:pPr>
             <a:r>
-              <a:t>會分：μ 是母體平均數，x̄ 是樣本平均數。</a:t>
+              <a:rPr lang="zh-TW" altLang="en-US" dirty="0">
+                <a:latin typeface="微軟正黑體" panose="020B0604030504040204" pitchFamily="34" charset="-120"/>
+                <a:ea typeface="微軟正黑體" panose="020B0604030504040204" pitchFamily="34" charset="-120"/>
+              </a:rPr>
+              <a:t>會分：𝜇是母體平均數，𝑥 ̅是樣本平均數。</a:t>
             </a:r>
           </a:p>
           <a:p>
@@ -8314,8 +9028,16 @@
               </a:defRPr>
             </a:pPr>
             <a:r>
+              <a:rPr lang="zh-TW" altLang="en-US" dirty="0">
+                <a:latin typeface="微軟正黑體" panose="020B0604030504040204" pitchFamily="34" charset="-120"/>
+                <a:ea typeface="微軟正黑體" panose="020B0604030504040204" pitchFamily="34" charset="-120"/>
+              </a:rPr>
               <a:t>會判斷：平均數何時有代表性？何時需要小心？</a:t>
             </a:r>
+            <a:endParaRPr dirty="0">
+              <a:latin typeface="微軟正黑體" panose="020B0604030504040204" pitchFamily="34" charset="-120"/>
+              <a:ea typeface="微軟正黑體" panose="020B0604030504040204" pitchFamily="34" charset="-120"/>
+            </a:endParaRPr>
           </a:p>
         </p:txBody>
       </p:sp>
@@ -8350,7 +9072,7 @@
               </a:defRPr>
             </a:pPr>
             <a:r>
-              <a:t>W03 | 26</a:t>
+              <a:t>W03 | 27</a:t>
             </a:r>
           </a:p>
         </p:txBody>
@@ -8363,8 +9085,8 @@
 </p:sld>
 </file>
 
-<file path=ppt/slides/slide27.xml><?xml version="1.0" encoding="utf-8"?>
-<p:sld xmlns:a="http://schemas.openxmlformats.org/drawingml/2006/main" xmlns:p="http://schemas.openxmlformats.org/presentationml/2006/main" xmlns:r="http://schemas.openxmlformats.org/officeDocument/2006/relationships">
+<file path=ppt/slides/slide28.xml><?xml version="1.0" encoding="utf-8"?>
+<p:sld xmlns:a="http://schemas.openxmlformats.org/drawingml/2006/main" xmlns:r="http://schemas.openxmlformats.org/officeDocument/2006/relationships" xmlns:p="http://schemas.openxmlformats.org/presentationml/2006/main">
   <p:cSld>
     <p:spTree>
       <p:nvGrpSpPr>
@@ -8372,7 +9094,14 @@
         <p:cNvGrpSpPr/>
         <p:nvPr/>
       </p:nvGrpSpPr>
-      <p:grpSpPr/>
+      <p:grpSpPr>
+        <a:xfrm>
+          <a:off x="0" y="0"/>
+          <a:ext cx="0" cy="0"/>
+          <a:chOff x="0" y="0"/>
+          <a:chExt cx="0" cy="0"/>
+        </a:xfrm>
+      </p:grpSpPr>
       <p:sp>
         <p:nvSpPr>
           <p:cNvPr id="2" name="Rectangle 1"/>
@@ -8413,6 +9142,7 @@
           <a:lstStyle/>
           <a:p>
             <a:pPr algn="ctr"/>
+            <a:endParaRPr/>
           </a:p>
         </p:txBody>
       </p:sp>
@@ -8521,6 +9251,21 @@
               <a:t>若資料中出現一個非常大的極端值，平均數通常會受到什麼影響？</a:t>
             </a:r>
           </a:p>
+          <a:p>
+            <a:r>
+              <a:t>答案①：(4＋6＋8＋10)÷4＝7</a:t>
+            </a:r>
+          </a:p>
+          <a:p>
+            <a:r>
+              <a:t>答案②：因為分組後看不到每筆原始資料，所以用各組組中點代表該組資料。</a:t>
+            </a:r>
+          </a:p>
+          <a:p>
+            <a:r>
+              <a:t>答案③：非常大的極端值通常會把平均數向上拉高。</a:t>
+            </a:r>
+          </a:p>
         </p:txBody>
       </p:sp>
       <p:sp>
@@ -8554,7 +9299,7 @@
               </a:defRPr>
             </a:pPr>
             <a:r>
-              <a:t>W03 | 27</a:t>
+              <a:t>W03 | 28</a:t>
             </a:r>
           </a:p>
         </p:txBody>
@@ -8568,7 +9313,7 @@
 </file>
 
 <file path=ppt/slides/slide3.xml><?xml version="1.0" encoding="utf-8"?>
-<p:sld xmlns:a="http://schemas.openxmlformats.org/drawingml/2006/main" xmlns:p="http://schemas.openxmlformats.org/presentationml/2006/main" xmlns:r="http://schemas.openxmlformats.org/officeDocument/2006/relationships">
+<p:sld xmlns:a="http://schemas.openxmlformats.org/drawingml/2006/main" xmlns:r="http://schemas.openxmlformats.org/officeDocument/2006/relationships" xmlns:p="http://schemas.openxmlformats.org/presentationml/2006/main">
   <p:cSld>
     <p:spTree>
       <p:nvGrpSpPr>
@@ -8576,7 +9321,14 @@
         <p:cNvGrpSpPr/>
         <p:nvPr/>
       </p:nvGrpSpPr>
-      <p:grpSpPr/>
+      <p:grpSpPr>
+        <a:xfrm>
+          <a:off x="0" y="0"/>
+          <a:ext cx="0" cy="0"/>
+          <a:chOff x="0" y="0"/>
+          <a:chExt cx="0" cy="0"/>
+        </a:xfrm>
+      </p:grpSpPr>
       <p:sp>
         <p:nvSpPr>
           <p:cNvPr id="2" name="Rectangle 1"/>
@@ -8617,6 +9369,7 @@
           <a:lstStyle/>
           <a:p>
             <a:pPr algn="ctr"/>
+            <a:endParaRPr/>
           </a:p>
         </p:txBody>
       </p:sp>
@@ -8772,7 +9525,7 @@
 </file>
 
 <file path=ppt/slides/slide4.xml><?xml version="1.0" encoding="utf-8"?>
-<p:sld xmlns:a="http://schemas.openxmlformats.org/drawingml/2006/main" xmlns:p="http://schemas.openxmlformats.org/presentationml/2006/main" xmlns:r="http://schemas.openxmlformats.org/officeDocument/2006/relationships">
+<p:sld xmlns:a="http://schemas.openxmlformats.org/drawingml/2006/main" xmlns:r="http://schemas.openxmlformats.org/officeDocument/2006/relationships" xmlns:p="http://schemas.openxmlformats.org/presentationml/2006/main">
   <p:cSld>
     <p:spTree>
       <p:nvGrpSpPr>
@@ -8780,7 +9533,14 @@
         <p:cNvGrpSpPr/>
         <p:nvPr/>
       </p:nvGrpSpPr>
-      <p:grpSpPr/>
+      <p:grpSpPr>
+        <a:xfrm>
+          <a:off x="0" y="0"/>
+          <a:ext cx="0" cy="0"/>
+          <a:chOff x="0" y="0"/>
+          <a:chExt cx="0" cy="0"/>
+        </a:xfrm>
+      </p:grpSpPr>
       <p:sp>
         <p:nvSpPr>
           <p:cNvPr id="2" name="Rectangle 1"/>
@@ -8821,6 +9581,7 @@
           <a:lstStyle/>
           <a:p>
             <a:pPr algn="ctr"/>
+            <a:endParaRPr/>
           </a:p>
         </p:txBody>
       </p:sp>
@@ -8894,7 +9655,7 @@
               </a:defRPr>
             </a:pPr>
             <a:r>
-              <a:t>舊教材指出，描述一群資料常從四個方向觀察：</a:t>
+              <a:t>描述一群資料，通常可以從四個方向觀察：</a:t>
             </a:r>
           </a:p>
           <a:p>
@@ -9024,7 +9785,7 @@
 </file>
 
 <file path=ppt/slides/slide5.xml><?xml version="1.0" encoding="utf-8"?>
-<p:sld xmlns:a="http://schemas.openxmlformats.org/drawingml/2006/main" xmlns:p="http://schemas.openxmlformats.org/presentationml/2006/main" xmlns:r="http://schemas.openxmlformats.org/officeDocument/2006/relationships">
+<p:sld xmlns:a="http://schemas.openxmlformats.org/drawingml/2006/main" xmlns:r="http://schemas.openxmlformats.org/officeDocument/2006/relationships" xmlns:p="http://schemas.openxmlformats.org/presentationml/2006/main">
   <p:cSld>
     <p:spTree>
       <p:nvGrpSpPr>
@@ -9032,7 +9793,14 @@
         <p:cNvGrpSpPr/>
         <p:nvPr/>
       </p:nvGrpSpPr>
-      <p:grpSpPr/>
+      <p:grpSpPr>
+        <a:xfrm>
+          <a:off x="0" y="0"/>
+          <a:ext cx="0" cy="0"/>
+          <a:chOff x="0" y="0"/>
+          <a:chExt cx="0" cy="0"/>
+        </a:xfrm>
+      </p:grpSpPr>
       <p:sp>
         <p:nvSpPr>
           <p:cNvPr id="2" name="Rectangle 1"/>
@@ -9073,6 +9841,7 @@
           <a:lstStyle/>
           <a:p>
             <a:pPr algn="ctr"/>
+            <a:endParaRPr/>
           </a:p>
         </p:txBody>
       </p:sp>
@@ -9121,7 +9890,7 @@
         <p:spPr>
           <a:xfrm>
             <a:off x="685800" y="1234440"/>
-            <a:ext cx="10789920" cy="4937760"/>
+            <a:ext cx="10789920" cy="1246495"/>
           </a:xfrm>
           <a:prstGeom prst="rect">
             <a:avLst/>
@@ -9146,7 +9915,18 @@
               </a:defRPr>
             </a:pPr>
             <a:r>
-              <a:t>集中趨勢量數也稱為位置量數（measures of central tendency）。</a:t>
+              <a:rPr lang="zh-TW" altLang="en-US" dirty="0">
+                <a:latin typeface="微軟正黑體" panose="020B0604030504040204" pitchFamily="34" charset="-120"/>
+                <a:ea typeface="微軟正黑體" panose="020B0604030504040204" pitchFamily="34" charset="-120"/>
+              </a:rPr>
+              <a:t>集中趨勢量數也稱為位置量數（</a:t>
+            </a:r>
+            <a:r>
+              <a:rPr lang="en-US" dirty="0">
+                <a:latin typeface="微軟正黑體" panose="020B0604030504040204" pitchFamily="34" charset="-120"/>
+                <a:ea typeface="微軟正黑體" panose="020B0604030504040204" pitchFamily="34" charset="-120"/>
+              </a:rPr>
+              <a:t>measures of central tendency）。</a:t>
             </a:r>
           </a:p>
           <a:p>
@@ -9162,6 +9942,10 @@
               </a:defRPr>
             </a:pPr>
             <a:r>
+              <a:rPr lang="zh-TW" altLang="en-US" dirty="0">
+                <a:latin typeface="微軟正黑體" panose="020B0604030504040204" pitchFamily="34" charset="-120"/>
+                <a:ea typeface="微軟正黑體" panose="020B0604030504040204" pitchFamily="34" charset="-120"/>
+              </a:rPr>
               <a:t>目的：用一個具有代表性的數值，描述一群資料大致集中在哪個位置。</a:t>
             </a:r>
           </a:p>
@@ -9178,7 +9962,11 @@
               </a:defRPr>
             </a:pPr>
             <a:r>
-              <a:t>它不是把所有資料都說完，而是先回答：「這群資料的中心大約在哪裡？」</a:t>
+              <a:rPr lang="zh-TW" altLang="en-US" dirty="0">
+                <a:latin typeface="微軟正黑體" panose="020B0604030504040204" pitchFamily="34" charset="-120"/>
+                <a:ea typeface="微軟正黑體" panose="020B0604030504040204" pitchFamily="34" charset="-120"/>
+              </a:rPr>
+              <a:t>它不用描述所有資料，只需示：「這群資料的中心大約在哪裡？」</a:t>
             </a:r>
           </a:p>
         </p:txBody>
@@ -9228,7 +10016,7 @@
 </file>
 
 <file path=ppt/slides/slide6.xml><?xml version="1.0" encoding="utf-8"?>
-<p:sld xmlns:a="http://schemas.openxmlformats.org/drawingml/2006/main" xmlns:p="http://schemas.openxmlformats.org/presentationml/2006/main" xmlns:r="http://schemas.openxmlformats.org/officeDocument/2006/relationships">
+<p:sld xmlns:a="http://schemas.openxmlformats.org/drawingml/2006/main" xmlns:r="http://schemas.openxmlformats.org/officeDocument/2006/relationships" xmlns:p="http://schemas.openxmlformats.org/presentationml/2006/main">
   <p:cSld>
     <p:spTree>
       <p:nvGrpSpPr>
@@ -9236,7 +10024,14 @@
         <p:cNvGrpSpPr/>
         <p:nvPr/>
       </p:nvGrpSpPr>
-      <p:grpSpPr/>
+      <p:grpSpPr>
+        <a:xfrm>
+          <a:off x="0" y="0"/>
+          <a:ext cx="0" cy="0"/>
+          <a:chOff x="0" y="0"/>
+          <a:chExt cx="0" cy="0"/>
+        </a:xfrm>
+      </p:grpSpPr>
       <p:sp>
         <p:nvSpPr>
           <p:cNvPr id="2" name="Rectangle 1"/>
@@ -9277,6 +10072,7 @@
           <a:lstStyle/>
           <a:p>
             <a:pPr algn="ctr"/>
+            <a:endParaRPr/>
           </a:p>
         </p:txBody>
       </p:sp>
@@ -9496,7 +10292,7 @@
 </file>
 
 <file path=ppt/slides/slide7.xml><?xml version="1.0" encoding="utf-8"?>
-<p:sld xmlns:a="http://schemas.openxmlformats.org/drawingml/2006/main" xmlns:p="http://schemas.openxmlformats.org/presentationml/2006/main" xmlns:r="http://schemas.openxmlformats.org/officeDocument/2006/relationships">
+<p:sld xmlns:a="http://schemas.openxmlformats.org/drawingml/2006/main" xmlns:r="http://schemas.openxmlformats.org/officeDocument/2006/relationships" xmlns:p="http://schemas.openxmlformats.org/presentationml/2006/main">
   <p:cSld>
     <p:spTree>
       <p:nvGrpSpPr>
@@ -9504,7 +10300,14 @@
         <p:cNvGrpSpPr/>
         <p:nvPr/>
       </p:nvGrpSpPr>
-      <p:grpSpPr/>
+      <p:grpSpPr>
+        <a:xfrm>
+          <a:off x="0" y="0"/>
+          <a:ext cx="0" cy="0"/>
+          <a:chOff x="0" y="0"/>
+          <a:chExt cx="0" cy="0"/>
+        </a:xfrm>
+      </p:grpSpPr>
       <p:sp>
         <p:nvSpPr>
           <p:cNvPr id="2" name="Rectangle 1"/>
@@ -9545,6 +10348,7 @@
           <a:lstStyle/>
           <a:p>
             <a:pPr algn="ctr"/>
+            <a:endParaRPr/>
           </a:p>
         </p:txBody>
       </p:sp>
@@ -9593,7 +10397,7 @@
         <p:spPr>
           <a:xfrm>
             <a:off x="685800" y="1234440"/>
-            <a:ext cx="10789920" cy="4937760"/>
+            <a:ext cx="10789920" cy="823302"/>
           </a:xfrm>
           <a:prstGeom prst="rect">
             <a:avLst/>
@@ -9618,6 +10422,7 @@
               </a:defRPr>
             </a:pPr>
             <a:r>
+              <a:rPr dirty="0"/>
               <a:t>W03：集中趨勢概念＋算術平均數。</a:t>
             </a:r>
           </a:p>
@@ -9634,23 +10439,8 @@
               </a:defRPr>
             </a:pPr>
             <a:r>
+              <a:rPr dirty="0"/>
               <a:t>W04：幾何平均數、中位數、分位數、眾數、截尾平均數、加權平均數與比較。</a:t>
-            </a:r>
-          </a:p>
-          <a:p>
-            <a:pPr>
-              <a:spcAft>
-                <a:spcPts val="900"/>
-              </a:spcAft>
-              <a:defRPr sz="2000">
-                <a:solidFill>
-                  <a:srgbClr val="2D2D2D"/>
-                </a:solidFill>
-                <a:latin typeface="Microsoft JhengHei"/>
-              </a:defRPr>
-            </a:pPr>
-            <a:r>
-              <a:t>因此今天不急著把所有代表值一次塞完。</a:t>
             </a:r>
           </a:p>
         </p:txBody>
@@ -9700,7 +10490,7 @@
 </file>
 
 <file path=ppt/slides/slide8.xml><?xml version="1.0" encoding="utf-8"?>
-<p:sld xmlns:a="http://schemas.openxmlformats.org/drawingml/2006/main" xmlns:p="http://schemas.openxmlformats.org/presentationml/2006/main" xmlns:r="http://schemas.openxmlformats.org/officeDocument/2006/relationships">
+<p:sld xmlns:a="http://schemas.openxmlformats.org/drawingml/2006/main" xmlns:r="http://schemas.openxmlformats.org/officeDocument/2006/relationships" xmlns:p="http://schemas.openxmlformats.org/presentationml/2006/main">
   <p:cSld>
     <p:spTree>
       <p:nvGrpSpPr>
@@ -9708,7 +10498,14 @@
         <p:cNvGrpSpPr/>
         <p:nvPr/>
       </p:nvGrpSpPr>
-      <p:grpSpPr/>
+      <p:grpSpPr>
+        <a:xfrm>
+          <a:off x="0" y="0"/>
+          <a:ext cx="0" cy="0"/>
+          <a:chOff x="0" y="0"/>
+          <a:chExt cx="0" cy="0"/>
+        </a:xfrm>
+      </p:grpSpPr>
       <p:sp>
         <p:nvSpPr>
           <p:cNvPr id="2" name="Rectangle 1"/>
@@ -9749,6 +10546,7 @@
           <a:lstStyle/>
           <a:p>
             <a:pPr algn="ctr"/>
+            <a:endParaRPr/>
           </a:p>
         </p:txBody>
       </p:sp>
@@ -9838,7 +10636,7 @@
               </a:defRPr>
             </a:pPr>
             <a:r>
-              <a:t>舊教材指出：適用於等距尺度與比率尺度變數。</a:t>
+              <a:t>適用於等距尺度與比率尺度變數。</a:t>
             </a:r>
           </a:p>
           <a:p>
@@ -9904,7 +10702,7 @@
 </file>
 
 <file path=ppt/slides/slide9.xml><?xml version="1.0" encoding="utf-8"?>
-<p:sld xmlns:a="http://schemas.openxmlformats.org/drawingml/2006/main" xmlns:p="http://schemas.openxmlformats.org/presentationml/2006/main" xmlns:r="http://schemas.openxmlformats.org/officeDocument/2006/relationships">
+<p:sld xmlns:a="http://schemas.openxmlformats.org/drawingml/2006/main" xmlns:r="http://schemas.openxmlformats.org/officeDocument/2006/relationships" xmlns:p="http://schemas.openxmlformats.org/presentationml/2006/main">
   <p:cSld>
     <p:spTree>
       <p:nvGrpSpPr>
@@ -9912,7 +10710,14 @@
         <p:cNvGrpSpPr/>
         <p:nvPr/>
       </p:nvGrpSpPr>
-      <p:grpSpPr/>
+      <p:grpSpPr>
+        <a:xfrm>
+          <a:off x="0" y="0"/>
+          <a:ext cx="0" cy="0"/>
+          <a:chOff x="0" y="0"/>
+          <a:chExt cx="0" cy="0"/>
+        </a:xfrm>
+      </p:grpSpPr>
       <p:sp>
         <p:nvSpPr>
           <p:cNvPr id="2" name="Rectangle 1"/>
@@ -9953,6 +10758,7 @@
           <a:lstStyle/>
           <a:p>
             <a:pPr algn="ctr"/>
+            <a:endParaRPr/>
           </a:p>
         </p:txBody>
       </p:sp>
@@ -10001,7 +10807,7 @@
         <p:spPr>
           <a:xfrm>
             <a:off x="685800" y="1234440"/>
-            <a:ext cx="10789920" cy="4937760"/>
+            <a:ext cx="10789920" cy="1246495"/>
           </a:xfrm>
           <a:prstGeom prst="rect">
             <a:avLst/>
@@ -10026,7 +10832,11 @@
               </a:defRPr>
             </a:pPr>
             <a:r>
-              <a:t>母體平均數以 μ 表示。</a:t>
+              <a:rPr lang="zh-TW" altLang="en-US" dirty="0">
+                <a:latin typeface="微軟正黑體" panose="020B0604030504040204" pitchFamily="34" charset="-120"/>
+                <a:ea typeface="微軟正黑體" panose="020B0604030504040204" pitchFamily="34" charset="-120"/>
+              </a:rPr>
+              <a:t>母體平均數以𝜇 表示。</a:t>
             </a:r>
           </a:p>
           <a:p>
@@ -10042,7 +10852,11 @@
               </a:defRPr>
             </a:pPr>
             <a:r>
-              <a:t>樣本平均數以 x̄ 表示。</a:t>
+              <a:rPr lang="zh-TW" altLang="en-US" dirty="0">
+                <a:latin typeface="微軟正黑體" panose="020B0604030504040204" pitchFamily="34" charset="-120"/>
+                <a:ea typeface="微軟正黑體" panose="020B0604030504040204" pitchFamily="34" charset="-120"/>
+              </a:rPr>
+              <a:t>樣本平均數以 𝑥 ̅表示。</a:t>
             </a:r>
           </a:p>
           <a:p>
@@ -10058,8 +10872,16 @@
               </a:defRPr>
             </a:pPr>
             <a:r>
+              <a:rPr lang="zh-TW" altLang="en-US" dirty="0">
+                <a:latin typeface="微軟正黑體" panose="020B0604030504040204" pitchFamily="34" charset="-120"/>
+                <a:ea typeface="微軟正黑體" panose="020B0604030504040204" pitchFamily="34" charset="-120"/>
+              </a:rPr>
               <a:t>符號不同，是因為一個描述母體參數，一個描述樣本統計量。</a:t>
             </a:r>
+            <a:endParaRPr dirty="0">
+              <a:latin typeface="微軟正黑體" panose="020B0604030504040204" pitchFamily="34" charset="-120"/>
+              <a:ea typeface="微軟正黑體" panose="020B0604030504040204" pitchFamily="34" charset="-120"/>
+            </a:endParaRPr>
           </a:p>
         </p:txBody>
       </p:sp>
